--- a/doc/AADDpictures.pptx
+++ b/doc/AADDpictures.pptx
@@ -9,6 +9,8 @@
     <p:sldId id="256" r:id="rId3"/>
     <p:sldId id="258" r:id="rId4"/>
     <p:sldId id="259" r:id="rId5"/>
+    <p:sldId id="260" r:id="rId6"/>
+    <p:sldId id="261" r:id="rId7"/>
   </p:sldIdLst>
   <p:sldSz cx="12192000" cy="6858000"/>
   <p:notesSz cx="6858000" cy="9144000"/>
@@ -264,7 +266,7 @@
           <a:p>
             <a:fld id="{C5B3381B-B92A-1444-B2B0-AFDBB0DC1AD3}" type="datetimeFigureOut">
               <a:rPr lang="en-US" smtClean="0"/>
-              <a:t>6/2/22</a:t>
+              <a:t>8/6/26</a:t>
             </a:fld>
             <a:endParaRPr lang="en-US"/>
           </a:p>
@@ -464,7 +466,7 @@
           <a:p>
             <a:fld id="{C5B3381B-B92A-1444-B2B0-AFDBB0DC1AD3}" type="datetimeFigureOut">
               <a:rPr lang="en-US" smtClean="0"/>
-              <a:t>6/2/22</a:t>
+              <a:t>8/6/26</a:t>
             </a:fld>
             <a:endParaRPr lang="en-US"/>
           </a:p>
@@ -674,7 +676,7 @@
           <a:p>
             <a:fld id="{C5B3381B-B92A-1444-B2B0-AFDBB0DC1AD3}" type="datetimeFigureOut">
               <a:rPr lang="en-US" smtClean="0"/>
-              <a:t>6/2/22</a:t>
+              <a:t>8/6/26</a:t>
             </a:fld>
             <a:endParaRPr lang="en-US"/>
           </a:p>
@@ -874,7 +876,7 @@
           <a:p>
             <a:fld id="{C5B3381B-B92A-1444-B2B0-AFDBB0DC1AD3}" type="datetimeFigureOut">
               <a:rPr lang="en-US" smtClean="0"/>
-              <a:t>6/2/22</a:t>
+              <a:t>8/6/26</a:t>
             </a:fld>
             <a:endParaRPr lang="en-US"/>
           </a:p>
@@ -1150,7 +1152,7 @@
           <a:p>
             <a:fld id="{C5B3381B-B92A-1444-B2B0-AFDBB0DC1AD3}" type="datetimeFigureOut">
               <a:rPr lang="en-US" smtClean="0"/>
-              <a:t>6/2/22</a:t>
+              <a:t>8/6/26</a:t>
             </a:fld>
             <a:endParaRPr lang="en-US"/>
           </a:p>
@@ -1418,7 +1420,7 @@
           <a:p>
             <a:fld id="{C5B3381B-B92A-1444-B2B0-AFDBB0DC1AD3}" type="datetimeFigureOut">
               <a:rPr lang="en-US" smtClean="0"/>
-              <a:t>6/2/22</a:t>
+              <a:t>8/6/26</a:t>
             </a:fld>
             <a:endParaRPr lang="en-US"/>
           </a:p>
@@ -1833,7 +1835,7 @@
           <a:p>
             <a:fld id="{C5B3381B-B92A-1444-B2B0-AFDBB0DC1AD3}" type="datetimeFigureOut">
               <a:rPr lang="en-US" smtClean="0"/>
-              <a:t>6/2/22</a:t>
+              <a:t>8/6/26</a:t>
             </a:fld>
             <a:endParaRPr lang="en-US"/>
           </a:p>
@@ -1975,7 +1977,7 @@
           <a:p>
             <a:fld id="{C5B3381B-B92A-1444-B2B0-AFDBB0DC1AD3}" type="datetimeFigureOut">
               <a:rPr lang="en-US" smtClean="0"/>
-              <a:t>6/2/22</a:t>
+              <a:t>8/6/26</a:t>
             </a:fld>
             <a:endParaRPr lang="en-US"/>
           </a:p>
@@ -2088,7 +2090,7 @@
           <a:p>
             <a:fld id="{C5B3381B-B92A-1444-B2B0-AFDBB0DC1AD3}" type="datetimeFigureOut">
               <a:rPr lang="en-US" smtClean="0"/>
-              <a:t>6/2/22</a:t>
+              <a:t>8/6/26</a:t>
             </a:fld>
             <a:endParaRPr lang="en-US"/>
           </a:p>
@@ -2401,7 +2403,7 @@
           <a:p>
             <a:fld id="{C5B3381B-B92A-1444-B2B0-AFDBB0DC1AD3}" type="datetimeFigureOut">
               <a:rPr lang="en-US" smtClean="0"/>
-              <a:t>6/2/22</a:t>
+              <a:t>8/6/26</a:t>
             </a:fld>
             <a:endParaRPr lang="en-US"/>
           </a:p>
@@ -2690,7 +2692,7 @@
           <a:p>
             <a:fld id="{C5B3381B-B92A-1444-B2B0-AFDBB0DC1AD3}" type="datetimeFigureOut">
               <a:rPr lang="en-US" smtClean="0"/>
-              <a:t>6/2/22</a:t>
+              <a:t>8/6/26</a:t>
             </a:fld>
             <a:endParaRPr lang="en-US"/>
           </a:p>
@@ -2933,7 +2935,7 @@
           <a:p>
             <a:fld id="{C5B3381B-B92A-1444-B2B0-AFDBB0DC1AD3}" type="datetimeFigureOut">
               <a:rPr lang="en-US" smtClean="0"/>
-              <a:t>6/2/22</a:t>
+              <a:t>8/6/26</a:t>
             </a:fld>
             <a:endParaRPr lang="en-US"/>
           </a:p>
@@ -3370,8 +3372,8 @@
             <a:chExt cx="7004692" cy="1537991"/>
           </a:xfrm>
         </p:grpSpPr>
-        <mc:AlternateContent xmlns:mc="http://schemas.openxmlformats.org/markup-compatibility/2006">
-          <mc:Choice xmlns:a14="http://schemas.microsoft.com/office/drawing/2010/main" Requires="a14">
+        <mc:AlternateContent xmlns:mc="http://schemas.openxmlformats.org/markup-compatibility/2006" xmlns:a14="http://schemas.microsoft.com/office/drawing/2010/main">
+          <mc:Choice Requires="a14">
             <p:sp>
               <p:nvSpPr>
                 <p:cNvPr id="5" name="Rechteck 4">
@@ -3529,7 +3531,7 @@
               </p:txBody>
             </p:sp>
           </mc:Choice>
-          <mc:Fallback>
+          <mc:Fallback xmlns="">
             <p:sp>
               <p:nvSpPr>
                 <p:cNvPr id="5" name="Rechteck 4">
@@ -6795,7 +6797,7 @@
                           <m:rPr>
                             <m:nor/>
                           </m:rPr>
-                          <a:rPr lang="en-US">
+                          <a:rPr lang="en-US" i="0">
                             <a:solidFill>
                               <a:schemeClr val="tx1"/>
                             </a:solidFill>
@@ -7141,6 +7143,2541 @@
     <p:extLst>
       <p:ext uri="{BB962C8B-B14F-4D97-AF65-F5344CB8AC3E}">
         <p14:creationId xmlns:p14="http://schemas.microsoft.com/office/powerpoint/2010/main" val="1165714308"/>
+      </p:ext>
+    </p:extLst>
+  </p:cSld>
+  <p:clrMapOvr>
+    <a:masterClrMapping/>
+  </p:clrMapOvr>
+</p:sld>
+</file>
+
+<file path=ppt/slides/slide5.xml><?xml version="1.0" encoding="utf-8"?>
+<p:sld xmlns:a="http://schemas.openxmlformats.org/drawingml/2006/main" xmlns:r="http://schemas.openxmlformats.org/officeDocument/2006/relationships" xmlns:p="http://schemas.openxmlformats.org/presentationml/2006/main">
+  <p:cSld>
+    <p:spTree>
+      <p:nvGrpSpPr>
+        <p:cNvPr id="1" name=""/>
+        <p:cNvGrpSpPr/>
+        <p:nvPr/>
+      </p:nvGrpSpPr>
+      <p:grpSpPr>
+        <a:xfrm>
+          <a:off x="0" y="0"/>
+          <a:ext cx="0" cy="0"/>
+          <a:chOff x="0" y="0"/>
+          <a:chExt cx="0" cy="0"/>
+        </a:xfrm>
+      </p:grpSpPr>
+      <p:grpSp>
+        <p:nvGrpSpPr>
+          <p:cNvPr id="86" name="Gruppieren 85">
+            <a:extLst>
+              <a:ext uri="{FF2B5EF4-FFF2-40B4-BE49-F238E27FC236}">
+                <a16:creationId xmlns:a16="http://schemas.microsoft.com/office/drawing/2014/main" id="{ABE2A5A9-8D82-5E19-0BAB-A0279E058850}"/>
+              </a:ext>
+            </a:extLst>
+          </p:cNvPr>
+          <p:cNvGrpSpPr/>
+          <p:nvPr/>
+        </p:nvGrpSpPr>
+        <p:grpSpPr>
+          <a:xfrm>
+            <a:off x="80157" y="234101"/>
+            <a:ext cx="11897708" cy="6468793"/>
+            <a:chOff x="80157" y="234101"/>
+            <a:chExt cx="11897708" cy="6468793"/>
+          </a:xfrm>
+        </p:grpSpPr>
+        <p:sp>
+          <p:nvSpPr>
+            <p:cNvPr id="4" name="Rechteck 3">
+              <a:extLst>
+                <a:ext uri="{FF2B5EF4-FFF2-40B4-BE49-F238E27FC236}">
+                  <a16:creationId xmlns:a16="http://schemas.microsoft.com/office/drawing/2014/main" id="{8A1872EB-B1B9-C1F6-582C-0958A05DFD82}"/>
+                </a:ext>
+              </a:extLst>
+            </p:cNvPr>
+            <p:cNvSpPr/>
+            <p:nvPr/>
+          </p:nvSpPr>
+          <p:spPr>
+            <a:xfrm>
+              <a:off x="4892578" y="234101"/>
+              <a:ext cx="5063359" cy="1728787"/>
+            </a:xfrm>
+            <a:prstGeom prst="rect">
+              <a:avLst/>
+            </a:prstGeom>
+            <a:solidFill>
+              <a:schemeClr val="bg1"/>
+            </a:solidFill>
+            <a:ln w="19050">
+              <a:solidFill>
+                <a:schemeClr val="tx1"/>
+              </a:solidFill>
+            </a:ln>
+          </p:spPr>
+          <p:style>
+            <a:lnRef idx="2">
+              <a:schemeClr val="accent1">
+                <a:shade val="50000"/>
+              </a:schemeClr>
+            </a:lnRef>
+            <a:fillRef idx="1">
+              <a:schemeClr val="accent1"/>
+            </a:fillRef>
+            <a:effectRef idx="0">
+              <a:schemeClr val="accent1"/>
+            </a:effectRef>
+            <a:fontRef idx="minor">
+              <a:schemeClr val="lt1"/>
+            </a:fontRef>
+          </p:style>
+          <p:txBody>
+            <a:bodyPr rtlCol="0" anchor="ctr"/>
+            <a:lstStyle/>
+            <a:p>
+              <a:pPr algn="ctr"/>
+              <a:r>
+                <a:rPr lang="en-US" b="1" noProof="1">
+                  <a:solidFill>
+                    <a:schemeClr val="tx1"/>
+                  </a:solidFill>
+                </a:rPr>
+                <a:t>Interface DD&lt;ValueType&gt;</a:t>
+              </a:r>
+            </a:p>
+            <a:p>
+              <a:pPr marL="285750" indent="-285750">
+                <a:buFont typeface="Arial" panose="020B0604020202020204" pitchFamily="34" charset="0"/>
+                <a:buChar char="•"/>
+              </a:pPr>
+              <a:r>
+                <a:rPr lang="en-US" sz="1600" noProof="1">
+                  <a:solidFill>
+                    <a:schemeClr val="tx1"/>
+                  </a:solidFill>
+                </a:rPr>
+                <a:t>Constants: </a:t>
+              </a:r>
+              <a:r>
+                <a:rPr lang="en-US" sz="1600" i="1" noProof="1">
+                  <a:solidFill>
+                    <a:schemeClr val="tx1"/>
+                  </a:solidFill>
+                </a:rPr>
+                <a:t>empty, zero, one, all</a:t>
+              </a:r>
+            </a:p>
+            <a:p>
+              <a:pPr marL="285750" indent="-285750">
+                <a:buFont typeface="Arial" panose="020B0604020202020204" pitchFamily="34" charset="0"/>
+                <a:buChar char="•"/>
+              </a:pPr>
+              <a:r>
+                <a:rPr lang="en-US" sz="1600" noProof="1">
+                  <a:solidFill>
+                    <a:schemeClr val="tx1"/>
+                  </a:solidFill>
+                </a:rPr>
+                <a:t>Set functions: </a:t>
+              </a:r>
+              <a:r>
+                <a:rPr lang="en-US" sz="1600" i="1" noProof="1">
+                  <a:solidFill>
+                    <a:schemeClr val="tx1"/>
+                  </a:solidFill>
+                </a:rPr>
+                <a:t>intersect(..), union(..)</a:t>
+              </a:r>
+            </a:p>
+            <a:p>
+              <a:pPr marL="285750" indent="-285750">
+                <a:buFont typeface="Arial" panose="020B0604020202020204" pitchFamily="34" charset="0"/>
+                <a:buChar char="•"/>
+              </a:pPr>
+              <a:r>
+                <a:rPr lang="en-US" sz="1600" noProof="1">
+                  <a:solidFill>
+                    <a:schemeClr val="tx1"/>
+                  </a:solidFill>
+                </a:rPr>
+                <a:t>Apply functions (implementation): </a:t>
+              </a:r>
+              <a:br>
+                <a:rPr lang="en-US" sz="1600" noProof="1">
+                  <a:solidFill>
+                    <a:schemeClr val="tx1"/>
+                  </a:solidFill>
+                </a:rPr>
+              </a:br>
+              <a:r>
+                <a:rPr lang="en-US" sz="1600" i="1" noProof="1">
+                  <a:solidFill>
+                    <a:schemeClr val="tx1"/>
+                  </a:solidFill>
+                </a:rPr>
+                <a:t>applyGeneric(..), applySplitGeneric(), … </a:t>
+              </a:r>
+              <a:endParaRPr lang="en-US" sz="1600" noProof="1">
+                <a:solidFill>
+                  <a:schemeClr val="tx1"/>
+                </a:solidFill>
+              </a:endParaRPr>
+            </a:p>
+          </p:txBody>
+        </p:sp>
+        <p:sp>
+          <p:nvSpPr>
+            <p:cNvPr id="5" name="Rechteck 4">
+              <a:extLst>
+                <a:ext uri="{FF2B5EF4-FFF2-40B4-BE49-F238E27FC236}">
+                  <a16:creationId xmlns:a16="http://schemas.microsoft.com/office/drawing/2014/main" id="{E3E2FAE7-33B8-B151-FCDB-1236B72DA32D}"/>
+                </a:ext>
+              </a:extLst>
+            </p:cNvPr>
+            <p:cNvSpPr/>
+            <p:nvPr/>
+          </p:nvSpPr>
+          <p:spPr>
+            <a:xfrm>
+              <a:off x="2870653" y="2525602"/>
+              <a:ext cx="2790496" cy="2238704"/>
+            </a:xfrm>
+            <a:prstGeom prst="rect">
+              <a:avLst/>
+            </a:prstGeom>
+            <a:solidFill>
+              <a:schemeClr val="bg1"/>
+            </a:solidFill>
+            <a:ln w="19050">
+              <a:solidFill>
+                <a:schemeClr val="tx1"/>
+              </a:solidFill>
+            </a:ln>
+          </p:spPr>
+          <p:style>
+            <a:lnRef idx="2">
+              <a:schemeClr val="accent1">
+                <a:shade val="50000"/>
+              </a:schemeClr>
+            </a:lnRef>
+            <a:fillRef idx="1">
+              <a:schemeClr val="accent1"/>
+            </a:fillRef>
+            <a:effectRef idx="0">
+              <a:schemeClr val="accent1"/>
+            </a:effectRef>
+            <a:fontRef idx="minor">
+              <a:schemeClr val="lt1"/>
+            </a:fontRef>
+          </p:style>
+          <p:txBody>
+            <a:bodyPr rtlCol="0" anchor="ctr"/>
+            <a:lstStyle/>
+            <a:p>
+              <a:pPr algn="ctr"/>
+              <a:r>
+                <a:rPr lang="en-US" b="1" noProof="1">
+                  <a:solidFill>
+                    <a:schemeClr val="tx1"/>
+                  </a:solidFill>
+                </a:rPr>
+                <a:t>Real (alias AADD)</a:t>
+              </a:r>
+              <a:br>
+                <a:rPr lang="en-US" b="1" noProof="1">
+                  <a:solidFill>
+                    <a:schemeClr val="tx1"/>
+                  </a:solidFill>
+                </a:rPr>
+              </a:br>
+              <a:endParaRPr lang="en-US" b="1" noProof="1">
+                <a:solidFill>
+                  <a:schemeClr val="tx1"/>
+                </a:solidFill>
+              </a:endParaRPr>
+            </a:p>
+            <a:p>
+              <a:pPr marL="285750" indent="-285750">
+                <a:buFont typeface="Arial" panose="020B0604020202020204" pitchFamily="34" charset="0"/>
+                <a:buChar char="•"/>
+              </a:pPr>
+              <a:r>
+                <a:rPr lang="en-US" sz="1600" noProof="1">
+                  <a:solidFill>
+                    <a:schemeClr val="tx1"/>
+                  </a:solidFill>
+                </a:rPr>
+                <a:t>Constants (ref.)</a:t>
+              </a:r>
+            </a:p>
+            <a:p>
+              <a:pPr marL="285750" indent="-285750">
+                <a:buFont typeface="Arial" panose="020B0604020202020204" pitchFamily="34" charset="0"/>
+                <a:buChar char="•"/>
+              </a:pPr>
+              <a:r>
+                <a:rPr lang="en-US" sz="1600" noProof="1">
+                  <a:solidFill>
+                    <a:schemeClr val="tx1"/>
+                  </a:solidFill>
+                </a:rPr>
+                <a:t>Set Functions</a:t>
+              </a:r>
+            </a:p>
+            <a:p>
+              <a:pPr marL="285750" indent="-285750">
+                <a:buFont typeface="Arial" panose="020B0604020202020204" pitchFamily="34" charset="0"/>
+                <a:buChar char="•"/>
+              </a:pPr>
+              <a:r>
+                <a:rPr lang="en-US" sz="1600" noProof="1">
+                  <a:solidFill>
+                    <a:schemeClr val="tx1"/>
+                  </a:solidFill>
+                </a:rPr>
+                <a:t>Arithmetic functions via apply</a:t>
+              </a:r>
+            </a:p>
+            <a:p>
+              <a:pPr marL="285750" indent="-285750">
+                <a:buFont typeface="Arial" panose="020B0604020202020204" pitchFamily="34" charset="0"/>
+                <a:buChar char="•"/>
+              </a:pPr>
+              <a:r>
+                <a:rPr lang="en-US" sz="1600" noProof="1">
+                  <a:solidFill>
+                    <a:schemeClr val="tx1"/>
+                  </a:solidFill>
+                </a:rPr>
+                <a:t>LP Solver</a:t>
+              </a:r>
+            </a:p>
+          </p:txBody>
+        </p:sp>
+        <p:sp>
+          <p:nvSpPr>
+            <p:cNvPr id="6" name="Rechteck 5">
+              <a:extLst>
+                <a:ext uri="{FF2B5EF4-FFF2-40B4-BE49-F238E27FC236}">
+                  <a16:creationId xmlns:a16="http://schemas.microsoft.com/office/drawing/2014/main" id="{852BBCB1-3D47-748B-D4C3-E3147BCB79EA}"/>
+                </a:ext>
+              </a:extLst>
+            </p:cNvPr>
+            <p:cNvSpPr/>
+            <p:nvPr/>
+          </p:nvSpPr>
+          <p:spPr>
+            <a:xfrm>
+              <a:off x="6029011" y="2525601"/>
+              <a:ext cx="2790496" cy="2238704"/>
+            </a:xfrm>
+            <a:prstGeom prst="rect">
+              <a:avLst/>
+            </a:prstGeom>
+            <a:solidFill>
+              <a:schemeClr val="bg1"/>
+            </a:solidFill>
+            <a:ln w="19050">
+              <a:solidFill>
+                <a:schemeClr val="tx1"/>
+              </a:solidFill>
+            </a:ln>
+          </p:spPr>
+          <p:style>
+            <a:lnRef idx="2">
+              <a:schemeClr val="accent1">
+                <a:shade val="50000"/>
+              </a:schemeClr>
+            </a:lnRef>
+            <a:fillRef idx="1">
+              <a:schemeClr val="accent1"/>
+            </a:fillRef>
+            <a:effectRef idx="0">
+              <a:schemeClr val="accent1"/>
+            </a:effectRef>
+            <a:fontRef idx="minor">
+              <a:schemeClr val="lt1"/>
+            </a:fontRef>
+          </p:style>
+          <p:txBody>
+            <a:bodyPr rtlCol="0" anchor="ctr"/>
+            <a:lstStyle/>
+            <a:p>
+              <a:pPr algn="ctr"/>
+              <a:r>
+                <a:rPr lang="en-US" b="1" noProof="1">
+                  <a:solidFill>
+                    <a:schemeClr val="tx1"/>
+                  </a:solidFill>
+                </a:rPr>
+                <a:t>Integer (alias IDD)</a:t>
+              </a:r>
+            </a:p>
+            <a:p>
+              <a:endParaRPr lang="en-US" b="1" noProof="1">
+                <a:solidFill>
+                  <a:schemeClr val="tx1"/>
+                </a:solidFill>
+              </a:endParaRPr>
+            </a:p>
+            <a:p>
+              <a:pPr marL="285750" indent="-285750">
+                <a:buFont typeface="Arial" panose="020B0604020202020204" pitchFamily="34" charset="0"/>
+                <a:buChar char="•"/>
+              </a:pPr>
+              <a:r>
+                <a:rPr lang="en-US" sz="1600" noProof="1">
+                  <a:solidFill>
+                    <a:schemeClr val="tx1"/>
+                  </a:solidFill>
+                </a:rPr>
+                <a:t>Constants (ref.)</a:t>
+              </a:r>
+            </a:p>
+            <a:p>
+              <a:pPr marL="285750" indent="-285750">
+                <a:buFont typeface="Arial" panose="020B0604020202020204" pitchFamily="34" charset="0"/>
+                <a:buChar char="•"/>
+              </a:pPr>
+              <a:r>
+                <a:rPr lang="en-US" sz="1600" noProof="1">
+                  <a:solidFill>
+                    <a:schemeClr val="tx1"/>
+                  </a:solidFill>
+                </a:rPr>
+                <a:t>Set Functions</a:t>
+              </a:r>
+            </a:p>
+            <a:p>
+              <a:pPr marL="285750" indent="-285750">
+                <a:buFont typeface="Arial" panose="020B0604020202020204" pitchFamily="34" charset="0"/>
+                <a:buChar char="•"/>
+              </a:pPr>
+              <a:r>
+                <a:rPr lang="en-US" sz="1600" noProof="1">
+                  <a:solidFill>
+                    <a:schemeClr val="tx1"/>
+                  </a:solidFill>
+                </a:rPr>
+                <a:t>Arithmetic functions via apply</a:t>
+              </a:r>
+            </a:p>
+            <a:p>
+              <a:pPr marL="285750" indent="-285750">
+                <a:buFont typeface="Arial" panose="020B0604020202020204" pitchFamily="34" charset="0"/>
+                <a:buChar char="•"/>
+              </a:pPr>
+              <a:endParaRPr lang="en-US" sz="1600" noProof="1">
+                <a:solidFill>
+                  <a:schemeClr val="tx1"/>
+                </a:solidFill>
+              </a:endParaRPr>
+            </a:p>
+          </p:txBody>
+        </p:sp>
+        <p:sp>
+          <p:nvSpPr>
+            <p:cNvPr id="7" name="Rechteck 6">
+              <a:extLst>
+                <a:ext uri="{FF2B5EF4-FFF2-40B4-BE49-F238E27FC236}">
+                  <a16:creationId xmlns:a16="http://schemas.microsoft.com/office/drawing/2014/main" id="{53ECCD4E-831D-478E-3707-5B3564F40B84}"/>
+                </a:ext>
+              </a:extLst>
+            </p:cNvPr>
+            <p:cNvSpPr/>
+            <p:nvPr/>
+          </p:nvSpPr>
+          <p:spPr>
+            <a:xfrm>
+              <a:off x="9187369" y="2525600"/>
+              <a:ext cx="2790496" cy="2238704"/>
+            </a:xfrm>
+            <a:prstGeom prst="rect">
+              <a:avLst/>
+            </a:prstGeom>
+            <a:solidFill>
+              <a:schemeClr val="bg1"/>
+            </a:solidFill>
+            <a:ln w="19050">
+              <a:solidFill>
+                <a:schemeClr val="tx1"/>
+              </a:solidFill>
+            </a:ln>
+          </p:spPr>
+          <p:style>
+            <a:lnRef idx="2">
+              <a:schemeClr val="accent1">
+                <a:shade val="50000"/>
+              </a:schemeClr>
+            </a:lnRef>
+            <a:fillRef idx="1">
+              <a:schemeClr val="accent1"/>
+            </a:fillRef>
+            <a:effectRef idx="0">
+              <a:schemeClr val="accent1"/>
+            </a:effectRef>
+            <a:fontRef idx="minor">
+              <a:schemeClr val="lt1"/>
+            </a:fontRef>
+          </p:style>
+          <p:txBody>
+            <a:bodyPr rtlCol="0" anchor="ctr"/>
+            <a:lstStyle/>
+            <a:p>
+              <a:pPr algn="ctr"/>
+              <a:r>
+                <a:rPr lang="en-US" b="1" noProof="1">
+                  <a:solidFill>
+                    <a:schemeClr val="tx1"/>
+                  </a:solidFill>
+                </a:rPr>
+                <a:t>Boolean (alias BDD)</a:t>
+              </a:r>
+            </a:p>
+            <a:p>
+              <a:endParaRPr lang="en-US" b="1" noProof="1">
+                <a:solidFill>
+                  <a:schemeClr val="tx1"/>
+                </a:solidFill>
+              </a:endParaRPr>
+            </a:p>
+            <a:p>
+              <a:pPr marL="285750" indent="-285750">
+                <a:buFont typeface="Arial" panose="020B0604020202020204" pitchFamily="34" charset="0"/>
+                <a:buChar char="•"/>
+              </a:pPr>
+              <a:r>
+                <a:rPr lang="en-US" sz="1600" noProof="1">
+                  <a:solidFill>
+                    <a:schemeClr val="tx1"/>
+                  </a:solidFill>
+                </a:rPr>
+                <a:t>Constants (ref.)</a:t>
+              </a:r>
+            </a:p>
+            <a:p>
+              <a:pPr marL="285750" indent="-285750">
+                <a:buFont typeface="Arial" panose="020B0604020202020204" pitchFamily="34" charset="0"/>
+                <a:buChar char="•"/>
+              </a:pPr>
+              <a:r>
+                <a:rPr lang="en-US" sz="1600" noProof="1">
+                  <a:solidFill>
+                    <a:schemeClr val="tx1"/>
+                  </a:solidFill>
+                </a:rPr>
+                <a:t>Set Functions</a:t>
+              </a:r>
+            </a:p>
+            <a:p>
+              <a:pPr marL="285750" indent="-285750">
+                <a:buFont typeface="Arial" panose="020B0604020202020204" pitchFamily="34" charset="0"/>
+                <a:buChar char="•"/>
+              </a:pPr>
+              <a:r>
+                <a:rPr lang="en-US" sz="1600" noProof="1">
+                  <a:solidFill>
+                    <a:schemeClr val="tx1"/>
+                  </a:solidFill>
+                </a:rPr>
+                <a:t>Boolean functions via apply</a:t>
+              </a:r>
+            </a:p>
+            <a:p>
+              <a:pPr marL="285750" indent="-285750">
+                <a:buFont typeface="Arial" panose="020B0604020202020204" pitchFamily="34" charset="0"/>
+                <a:buChar char="•"/>
+              </a:pPr>
+              <a:endParaRPr lang="en-US" b="1" noProof="1">
+                <a:solidFill>
+                  <a:schemeClr val="tx1"/>
+                </a:solidFill>
+              </a:endParaRPr>
+            </a:p>
+            <a:p>
+              <a:endParaRPr lang="en-US" b="1" noProof="1">
+                <a:solidFill>
+                  <a:schemeClr val="tx1"/>
+                </a:solidFill>
+              </a:endParaRPr>
+            </a:p>
+          </p:txBody>
+        </p:sp>
+        <p:sp>
+          <p:nvSpPr>
+            <p:cNvPr id="11" name="Rechteck 10">
+              <a:extLst>
+                <a:ext uri="{FF2B5EF4-FFF2-40B4-BE49-F238E27FC236}">
+                  <a16:creationId xmlns:a16="http://schemas.microsoft.com/office/drawing/2014/main" id="{48886B5C-FC8F-D6DB-B3CE-F0B274A90059}"/>
+                </a:ext>
+              </a:extLst>
+            </p:cNvPr>
+            <p:cNvSpPr/>
+            <p:nvPr/>
+          </p:nvSpPr>
+          <p:spPr>
+            <a:xfrm>
+              <a:off x="80157" y="234101"/>
+              <a:ext cx="2262993" cy="3594949"/>
+            </a:xfrm>
+            <a:prstGeom prst="rect">
+              <a:avLst/>
+            </a:prstGeom>
+            <a:solidFill>
+              <a:schemeClr val="bg1"/>
+            </a:solidFill>
+            <a:ln w="19050">
+              <a:solidFill>
+                <a:schemeClr val="tx1"/>
+              </a:solidFill>
+            </a:ln>
+          </p:spPr>
+          <p:style>
+            <a:lnRef idx="2">
+              <a:schemeClr val="accent1">
+                <a:shade val="50000"/>
+              </a:schemeClr>
+            </a:lnRef>
+            <a:fillRef idx="1">
+              <a:schemeClr val="accent1"/>
+            </a:fillRef>
+            <a:effectRef idx="0">
+              <a:schemeClr val="accent1"/>
+            </a:effectRef>
+            <a:fontRef idx="minor">
+              <a:schemeClr val="lt1"/>
+            </a:fontRef>
+          </p:style>
+          <p:txBody>
+            <a:bodyPr rtlCol="0" anchor="ctr"/>
+            <a:lstStyle/>
+            <a:p>
+              <a:pPr algn="ctr"/>
+              <a:r>
+                <a:rPr lang="en-US" b="1" noProof="1">
+                  <a:solidFill>
+                    <a:schemeClr val="tx1"/>
+                  </a:solidFill>
+                </a:rPr>
+                <a:t>DDBuilder</a:t>
+              </a:r>
+            </a:p>
+            <a:p>
+              <a:pPr algn="ctr"/>
+              <a:endParaRPr lang="en-US" b="1" noProof="1">
+                <a:solidFill>
+                  <a:schemeClr val="tx1"/>
+                </a:solidFill>
+              </a:endParaRPr>
+            </a:p>
+            <a:p>
+              <a:r>
+                <a:rPr lang="en-US" sz="1600" b="1" noProof="1">
+                  <a:solidFill>
+                    <a:schemeClr val="tx1"/>
+                  </a:solidFill>
+                </a:rPr>
+                <a:t>Factory</a:t>
+              </a:r>
+            </a:p>
+            <a:p>
+              <a:pPr marL="285750" indent="-285750">
+                <a:buFont typeface="Arial" panose="020B0604020202020204" pitchFamily="34" charset="0"/>
+                <a:buChar char="•"/>
+              </a:pPr>
+              <a:r>
+                <a:rPr lang="en-US" sz="1600" noProof="1">
+                  <a:solidFill>
+                    <a:schemeClr val="tx1"/>
+                  </a:solidFill>
+                </a:rPr>
+                <a:t>real(..)</a:t>
+              </a:r>
+            </a:p>
+            <a:p>
+              <a:pPr marL="285750" indent="-285750">
+                <a:buFont typeface="Arial" panose="020B0604020202020204" pitchFamily="34" charset="0"/>
+                <a:buChar char="•"/>
+              </a:pPr>
+              <a:r>
+                <a:rPr lang="en-US" sz="1600" noProof="1">
+                  <a:solidFill>
+                    <a:schemeClr val="tx1"/>
+                  </a:solidFill>
+                </a:rPr>
+                <a:t>integer(..)</a:t>
+              </a:r>
+            </a:p>
+            <a:p>
+              <a:pPr marL="285750" indent="-285750">
+                <a:buFont typeface="Arial" panose="020B0604020202020204" pitchFamily="34" charset="0"/>
+                <a:buChar char="•"/>
+              </a:pPr>
+              <a:r>
+                <a:rPr lang="en-US" sz="1600" noProof="1">
+                  <a:solidFill>
+                    <a:schemeClr val="tx1"/>
+                  </a:solidFill>
+                </a:rPr>
+                <a:t>boolean(..)</a:t>
+              </a:r>
+            </a:p>
+            <a:p>
+              <a:pPr marL="285750" indent="-285750">
+                <a:buFont typeface="Arial" panose="020B0604020202020204" pitchFamily="34" charset="0"/>
+                <a:buChar char="•"/>
+              </a:pPr>
+              <a:endParaRPr lang="en-US" sz="1600" noProof="1">
+                <a:solidFill>
+                  <a:schemeClr val="tx1"/>
+                </a:solidFill>
+              </a:endParaRPr>
+            </a:p>
+            <a:p>
+              <a:r>
+                <a:rPr lang="en-US" sz="1600" b="1" noProof="1">
+                  <a:solidFill>
+                    <a:schemeClr val="tx1"/>
+                  </a:solidFill>
+                </a:rPr>
+                <a:t>Constants</a:t>
+              </a:r>
+            </a:p>
+            <a:p>
+              <a:pPr marL="285750" indent="-285750">
+                <a:buFont typeface="Arial" panose="020B0604020202020204" pitchFamily="34" charset="0"/>
+                <a:buChar char="•"/>
+              </a:pPr>
+              <a:r>
+                <a:rPr lang="en-US" sz="1600" noProof="1">
+                  <a:solidFill>
+                    <a:schemeClr val="tx1"/>
+                  </a:solidFill>
+                </a:rPr>
+                <a:t>Reals.All, … </a:t>
+              </a:r>
+            </a:p>
+            <a:p>
+              <a:endParaRPr lang="en-US" sz="1600" b="1" noProof="1">
+                <a:solidFill>
+                  <a:schemeClr val="tx1"/>
+                </a:solidFill>
+              </a:endParaRPr>
+            </a:p>
+            <a:p>
+              <a:r>
+                <a:rPr lang="en-US" sz="1600" b="1" noProof="1">
+                  <a:solidFill>
+                    <a:schemeClr val="bg1">
+                      <a:lumMod val="50000"/>
+                    </a:schemeClr>
+                  </a:solidFill>
+                </a:rPr>
+                <a:t>ConditionManager</a:t>
+              </a:r>
+              <a:endParaRPr lang="en-US" sz="1600" noProof="1">
+                <a:solidFill>
+                  <a:schemeClr val="bg1">
+                    <a:lumMod val="50000"/>
+                  </a:schemeClr>
+                </a:solidFill>
+              </a:endParaRPr>
+            </a:p>
+            <a:p>
+              <a:r>
+                <a:rPr lang="en-US" sz="1600" b="1" noProof="1">
+                  <a:solidFill>
+                    <a:schemeClr val="bg1">
+                      <a:lumMod val="50000"/>
+                    </a:schemeClr>
+                  </a:solidFill>
+                </a:rPr>
+                <a:t>NoiseVariableManager</a:t>
+              </a:r>
+            </a:p>
+          </p:txBody>
+        </p:sp>
+        <p:sp>
+          <p:nvSpPr>
+            <p:cNvPr id="15" name="Rechteck 14">
+              <a:extLst>
+                <a:ext uri="{FF2B5EF4-FFF2-40B4-BE49-F238E27FC236}">
+                  <a16:creationId xmlns:a16="http://schemas.microsoft.com/office/drawing/2014/main" id="{73CB4A9F-FA75-CC13-891B-E82A4D4679D0}"/>
+                </a:ext>
+              </a:extLst>
+            </p:cNvPr>
+            <p:cNvSpPr/>
+            <p:nvPr/>
+          </p:nvSpPr>
+          <p:spPr>
+            <a:xfrm>
+              <a:off x="80157" y="5188980"/>
+              <a:ext cx="2262993" cy="1513914"/>
+            </a:xfrm>
+            <a:prstGeom prst="rect">
+              <a:avLst/>
+            </a:prstGeom>
+            <a:solidFill>
+              <a:schemeClr val="bg1"/>
+            </a:solidFill>
+            <a:ln w="19050">
+              <a:solidFill>
+                <a:schemeClr val="tx1"/>
+              </a:solidFill>
+            </a:ln>
+          </p:spPr>
+          <p:style>
+            <a:lnRef idx="2">
+              <a:schemeClr val="accent1">
+                <a:shade val="50000"/>
+              </a:schemeClr>
+            </a:lnRef>
+            <a:fillRef idx="1">
+              <a:schemeClr val="accent1"/>
+            </a:fillRef>
+            <a:effectRef idx="0">
+              <a:schemeClr val="accent1"/>
+            </a:effectRef>
+            <a:fontRef idx="minor">
+              <a:schemeClr val="lt1"/>
+            </a:fontRef>
+          </p:style>
+          <p:txBody>
+            <a:bodyPr rtlCol="0" anchor="ctr"/>
+            <a:lstStyle/>
+            <a:p>
+              <a:pPr algn="ctr"/>
+              <a:r>
+                <a:rPr lang="en-US" b="1" noProof="1">
+                  <a:solidFill>
+                    <a:schemeClr val="tx1"/>
+                  </a:solidFill>
+                </a:rPr>
+                <a:t>UnaryFunction</a:t>
+              </a:r>
+              <a:br>
+                <a:rPr lang="en-US" b="1" noProof="1">
+                  <a:solidFill>
+                    <a:schemeClr val="tx1"/>
+                  </a:solidFill>
+                </a:rPr>
+              </a:br>
+              <a:endParaRPr lang="en-US" noProof="1">
+                <a:solidFill>
+                  <a:schemeClr val="tx1"/>
+                </a:solidFill>
+              </a:endParaRPr>
+            </a:p>
+            <a:p>
+              <a:pPr marL="285750" indent="-285750">
+                <a:buFont typeface="Arial" panose="020B0604020202020204" pitchFamily="34" charset="0"/>
+                <a:buChar char="•"/>
+              </a:pPr>
+              <a:r>
+                <a:rPr lang="en-US" noProof="1">
+                  <a:solidFill>
+                    <a:schemeClr val="tx1"/>
+                  </a:solidFill>
+                </a:rPr>
+                <a:t>Math. properties</a:t>
+              </a:r>
+            </a:p>
+            <a:p>
+              <a:pPr marL="285750" indent="-285750">
+                <a:buFont typeface="Arial" panose="020B0604020202020204" pitchFamily="34" charset="0"/>
+                <a:buChar char="•"/>
+              </a:pPr>
+              <a:r>
+                <a:rPr lang="en-US" noProof="1">
+                  <a:solidFill>
+                    <a:schemeClr val="tx1"/>
+                  </a:solidFill>
+                </a:rPr>
+                <a:t>linearize()</a:t>
+              </a:r>
+            </a:p>
+            <a:p>
+              <a:pPr marL="285750" indent="-285750">
+                <a:buFont typeface="Arial" panose="020B0604020202020204" pitchFamily="34" charset="0"/>
+                <a:buChar char="•"/>
+              </a:pPr>
+              <a:r>
+                <a:rPr lang="en-US" noProof="1">
+                  <a:solidFill>
+                    <a:schemeClr val="tx1"/>
+                  </a:solidFill>
+                </a:rPr>
+                <a:t>splitPoints</a:t>
+              </a:r>
+            </a:p>
+          </p:txBody>
+        </p:sp>
+        <p:cxnSp>
+          <p:nvCxnSpPr>
+            <p:cNvPr id="17" name="Gewinkelte Verbindung 16">
+              <a:extLst>
+                <a:ext uri="{FF2B5EF4-FFF2-40B4-BE49-F238E27FC236}">
+                  <a16:creationId xmlns:a16="http://schemas.microsoft.com/office/drawing/2014/main" id="{9B613673-3FDE-A9D4-FEE4-8862362ADBA7}"/>
+                </a:ext>
+              </a:extLst>
+            </p:cNvPr>
+            <p:cNvCxnSpPr>
+              <a:stCxn id="5" idx="0"/>
+              <a:endCxn id="4" idx="2"/>
+            </p:cNvCxnSpPr>
+            <p:nvPr/>
+          </p:nvCxnSpPr>
+          <p:spPr>
+            <a:xfrm rot="5400000" flipH="1" flipV="1">
+              <a:off x="5563722" y="665067"/>
+              <a:ext cx="562714" cy="3158357"/>
+            </a:xfrm>
+            <a:prstGeom prst="bentConnector3">
+              <a:avLst>
+                <a:gd name="adj1" fmla="val 29687"/>
+              </a:avLst>
+            </a:prstGeom>
+            <a:ln w="19050">
+              <a:solidFill>
+                <a:schemeClr val="tx1"/>
+              </a:solidFill>
+              <a:tailEnd type="triangle"/>
+            </a:ln>
+          </p:spPr>
+          <p:style>
+            <a:lnRef idx="1">
+              <a:schemeClr val="accent1"/>
+            </a:lnRef>
+            <a:fillRef idx="0">
+              <a:schemeClr val="accent1"/>
+            </a:fillRef>
+            <a:effectRef idx="0">
+              <a:schemeClr val="accent1"/>
+            </a:effectRef>
+            <a:fontRef idx="minor">
+              <a:schemeClr val="tx1"/>
+            </a:fontRef>
+          </p:style>
+        </p:cxnSp>
+        <p:cxnSp>
+          <p:nvCxnSpPr>
+            <p:cNvPr id="18" name="Gewinkelte Verbindung 17">
+              <a:extLst>
+                <a:ext uri="{FF2B5EF4-FFF2-40B4-BE49-F238E27FC236}">
+                  <a16:creationId xmlns:a16="http://schemas.microsoft.com/office/drawing/2014/main" id="{28A60A01-0224-4D4B-1955-6EC8346FC88E}"/>
+                </a:ext>
+              </a:extLst>
+            </p:cNvPr>
+            <p:cNvCxnSpPr>
+              <a:cxnSpLocks/>
+              <a:stCxn id="6" idx="0"/>
+              <a:endCxn id="4" idx="2"/>
+            </p:cNvCxnSpPr>
+            <p:nvPr/>
+          </p:nvCxnSpPr>
+          <p:spPr>
+            <a:xfrm rot="16200000" flipV="1">
+              <a:off x="7142903" y="2244244"/>
+              <a:ext cx="562713" cy="1"/>
+            </a:xfrm>
+            <a:prstGeom prst="bentConnector3">
+              <a:avLst>
+                <a:gd name="adj1" fmla="val 50000"/>
+              </a:avLst>
+            </a:prstGeom>
+            <a:ln w="19050">
+              <a:solidFill>
+                <a:schemeClr val="tx1"/>
+              </a:solidFill>
+              <a:tailEnd type="triangle"/>
+            </a:ln>
+          </p:spPr>
+          <p:style>
+            <a:lnRef idx="1">
+              <a:schemeClr val="accent1"/>
+            </a:lnRef>
+            <a:fillRef idx="0">
+              <a:schemeClr val="accent1"/>
+            </a:fillRef>
+            <a:effectRef idx="0">
+              <a:schemeClr val="accent1"/>
+            </a:effectRef>
+            <a:fontRef idx="minor">
+              <a:schemeClr val="tx1"/>
+            </a:fontRef>
+          </p:style>
+        </p:cxnSp>
+        <p:cxnSp>
+          <p:nvCxnSpPr>
+            <p:cNvPr id="21" name="Gewinkelte Verbindung 20">
+              <a:extLst>
+                <a:ext uri="{FF2B5EF4-FFF2-40B4-BE49-F238E27FC236}">
+                  <a16:creationId xmlns:a16="http://schemas.microsoft.com/office/drawing/2014/main" id="{5E614950-1384-AF1F-ED84-C28AE8039BE9}"/>
+                </a:ext>
+              </a:extLst>
+            </p:cNvPr>
+            <p:cNvCxnSpPr>
+              <a:cxnSpLocks/>
+              <a:stCxn id="7" idx="0"/>
+              <a:endCxn id="4" idx="2"/>
+            </p:cNvCxnSpPr>
+            <p:nvPr/>
+          </p:nvCxnSpPr>
+          <p:spPr>
+            <a:xfrm rot="16200000" flipV="1">
+              <a:off x="8722082" y="665064"/>
+              <a:ext cx="562712" cy="3158359"/>
+            </a:xfrm>
+            <a:prstGeom prst="bentConnector3">
+              <a:avLst>
+                <a:gd name="adj1" fmla="val 29687"/>
+              </a:avLst>
+            </a:prstGeom>
+            <a:ln w="19050">
+              <a:solidFill>
+                <a:schemeClr val="tx1"/>
+              </a:solidFill>
+              <a:tailEnd type="triangle" w="lg" len="lg"/>
+            </a:ln>
+          </p:spPr>
+          <p:style>
+            <a:lnRef idx="1">
+              <a:schemeClr val="accent1"/>
+            </a:lnRef>
+            <a:fillRef idx="0">
+              <a:schemeClr val="accent1"/>
+            </a:fillRef>
+            <a:effectRef idx="0">
+              <a:schemeClr val="accent1"/>
+            </a:effectRef>
+            <a:fontRef idx="minor">
+              <a:schemeClr val="tx1"/>
+            </a:fontRef>
+          </p:style>
+        </p:cxnSp>
+        <p:sp>
+          <p:nvSpPr>
+            <p:cNvPr id="25" name="Dreieck 24">
+              <a:extLst>
+                <a:ext uri="{FF2B5EF4-FFF2-40B4-BE49-F238E27FC236}">
+                  <a16:creationId xmlns:a16="http://schemas.microsoft.com/office/drawing/2014/main" id="{A67D0055-EC58-A16B-2A20-F45311CA2147}"/>
+                </a:ext>
+              </a:extLst>
+            </p:cNvPr>
+            <p:cNvSpPr/>
+            <p:nvPr/>
+          </p:nvSpPr>
+          <p:spPr>
+            <a:xfrm>
+              <a:off x="7302815" y="1962885"/>
+              <a:ext cx="242888" cy="200025"/>
+            </a:xfrm>
+            <a:prstGeom prst="triangle">
+              <a:avLst/>
+            </a:prstGeom>
+            <a:solidFill>
+              <a:schemeClr val="bg1"/>
+            </a:solidFill>
+            <a:ln w="19050">
+              <a:solidFill>
+                <a:schemeClr val="tx1"/>
+              </a:solidFill>
+            </a:ln>
+          </p:spPr>
+          <p:style>
+            <a:lnRef idx="2">
+              <a:schemeClr val="accent1">
+                <a:shade val="50000"/>
+              </a:schemeClr>
+            </a:lnRef>
+            <a:fillRef idx="1">
+              <a:schemeClr val="accent1"/>
+            </a:fillRef>
+            <a:effectRef idx="0">
+              <a:schemeClr val="accent1"/>
+            </a:effectRef>
+            <a:fontRef idx="minor">
+              <a:schemeClr val="lt1"/>
+            </a:fontRef>
+          </p:style>
+          <p:txBody>
+            <a:bodyPr rtlCol="0" anchor="ctr"/>
+            <a:lstStyle/>
+            <a:p>
+              <a:pPr algn="ctr"/>
+              <a:endParaRPr lang="en-US" dirty="0"/>
+            </a:p>
+          </p:txBody>
+        </p:sp>
+        <p:grpSp>
+          <p:nvGrpSpPr>
+            <p:cNvPr id="59" name="Gruppieren 58">
+              <a:extLst>
+                <a:ext uri="{FF2B5EF4-FFF2-40B4-BE49-F238E27FC236}">
+                  <a16:creationId xmlns:a16="http://schemas.microsoft.com/office/drawing/2014/main" id="{9F4A0C46-E4D9-FEAA-1C05-26FE2006BE94}"/>
+                </a:ext>
+              </a:extLst>
+            </p:cNvPr>
+            <p:cNvGrpSpPr/>
+            <p:nvPr/>
+          </p:nvGrpSpPr>
+          <p:grpSpPr>
+            <a:xfrm>
+              <a:off x="2870653" y="5188980"/>
+              <a:ext cx="9107212" cy="1017443"/>
+              <a:chOff x="2870653" y="5088964"/>
+              <a:chExt cx="9107212" cy="1017443"/>
+            </a:xfrm>
+          </p:grpSpPr>
+          <p:sp>
+            <p:nvSpPr>
+              <p:cNvPr id="8" name="Rechteck 7">
+                <a:extLst>
+                  <a:ext uri="{FF2B5EF4-FFF2-40B4-BE49-F238E27FC236}">
+                    <a16:creationId xmlns:a16="http://schemas.microsoft.com/office/drawing/2014/main" id="{CF17C2FA-D3F3-4BC1-A11D-F6A99D9608C9}"/>
+                  </a:ext>
+                </a:extLst>
+              </p:cNvPr>
+              <p:cNvSpPr/>
+              <p:nvPr/>
+            </p:nvSpPr>
+            <p:spPr>
+              <a:xfrm>
+                <a:off x="2870653" y="5088966"/>
+                <a:ext cx="2790496" cy="447850"/>
+              </a:xfrm>
+              <a:prstGeom prst="rect">
+                <a:avLst/>
+              </a:prstGeom>
+              <a:solidFill>
+                <a:schemeClr val="bg1"/>
+              </a:solidFill>
+              <a:ln w="19050">
+                <a:solidFill>
+                  <a:schemeClr val="tx1"/>
+                </a:solidFill>
+              </a:ln>
+            </p:spPr>
+            <p:style>
+              <a:lnRef idx="2">
+                <a:schemeClr val="accent1">
+                  <a:shade val="50000"/>
+                </a:schemeClr>
+              </a:lnRef>
+              <a:fillRef idx="1">
+                <a:schemeClr val="accent1"/>
+              </a:fillRef>
+              <a:effectRef idx="0">
+                <a:schemeClr val="accent1"/>
+              </a:effectRef>
+              <a:fontRef idx="minor">
+                <a:schemeClr val="lt1"/>
+              </a:fontRef>
+            </p:style>
+            <p:txBody>
+              <a:bodyPr rtlCol="0" anchor="ctr"/>
+              <a:lstStyle/>
+              <a:p>
+                <a:pPr algn="ctr"/>
+                <a:r>
+                  <a:rPr lang="en-US" b="1" noProof="1">
+                    <a:solidFill>
+                      <a:schemeClr val="tx1"/>
+                    </a:solidFill>
+                  </a:rPr>
+                  <a:t>AffineForm</a:t>
+                </a:r>
+              </a:p>
+            </p:txBody>
+          </p:sp>
+          <p:sp>
+            <p:nvSpPr>
+              <p:cNvPr id="9" name="Rechteck 8">
+                <a:extLst>
+                  <a:ext uri="{FF2B5EF4-FFF2-40B4-BE49-F238E27FC236}">
+                    <a16:creationId xmlns:a16="http://schemas.microsoft.com/office/drawing/2014/main" id="{D008734D-D39F-0345-3F0A-5B4D0FF43CB8}"/>
+                  </a:ext>
+                </a:extLst>
+              </p:cNvPr>
+              <p:cNvSpPr/>
+              <p:nvPr/>
+            </p:nvSpPr>
+            <p:spPr>
+              <a:xfrm>
+                <a:off x="6029010" y="5088964"/>
+                <a:ext cx="2790496" cy="447851"/>
+              </a:xfrm>
+              <a:prstGeom prst="rect">
+                <a:avLst/>
+              </a:prstGeom>
+              <a:solidFill>
+                <a:schemeClr val="bg1"/>
+              </a:solidFill>
+              <a:ln w="19050">
+                <a:solidFill>
+                  <a:schemeClr val="tx1"/>
+                </a:solidFill>
+              </a:ln>
+            </p:spPr>
+            <p:style>
+              <a:lnRef idx="2">
+                <a:schemeClr val="accent1">
+                  <a:shade val="50000"/>
+                </a:schemeClr>
+              </a:lnRef>
+              <a:fillRef idx="1">
+                <a:schemeClr val="accent1"/>
+              </a:fillRef>
+              <a:effectRef idx="0">
+                <a:schemeClr val="accent1"/>
+              </a:effectRef>
+              <a:fontRef idx="minor">
+                <a:schemeClr val="lt1"/>
+              </a:fontRef>
+            </p:style>
+            <p:txBody>
+              <a:bodyPr rtlCol="0" anchor="ctr"/>
+              <a:lstStyle/>
+              <a:p>
+                <a:pPr algn="ctr"/>
+                <a:r>
+                  <a:rPr lang="en-US" b="1" noProof="1">
+                    <a:solidFill>
+                      <a:schemeClr val="tx1"/>
+                    </a:solidFill>
+                  </a:rPr>
+                  <a:t>IntegerRange</a:t>
+                </a:r>
+              </a:p>
+            </p:txBody>
+          </p:sp>
+          <p:sp>
+            <p:nvSpPr>
+              <p:cNvPr id="10" name="Rechteck 9">
+                <a:extLst>
+                  <a:ext uri="{FF2B5EF4-FFF2-40B4-BE49-F238E27FC236}">
+                    <a16:creationId xmlns:a16="http://schemas.microsoft.com/office/drawing/2014/main" id="{520F42B6-3ECF-E46D-A40A-F306143A2337}"/>
+                  </a:ext>
+                </a:extLst>
+              </p:cNvPr>
+              <p:cNvSpPr/>
+              <p:nvPr/>
+            </p:nvSpPr>
+            <p:spPr>
+              <a:xfrm>
+                <a:off x="9187369" y="5088964"/>
+                <a:ext cx="2790496" cy="447852"/>
+              </a:xfrm>
+              <a:prstGeom prst="rect">
+                <a:avLst/>
+              </a:prstGeom>
+              <a:solidFill>
+                <a:schemeClr val="bg1"/>
+              </a:solidFill>
+              <a:ln w="19050">
+                <a:solidFill>
+                  <a:schemeClr val="tx1"/>
+                </a:solidFill>
+              </a:ln>
+            </p:spPr>
+            <p:style>
+              <a:lnRef idx="2">
+                <a:schemeClr val="accent1">
+                  <a:shade val="50000"/>
+                </a:schemeClr>
+              </a:lnRef>
+              <a:fillRef idx="1">
+                <a:schemeClr val="accent1"/>
+              </a:fillRef>
+              <a:effectRef idx="0">
+                <a:schemeClr val="accent1"/>
+              </a:effectRef>
+              <a:fontRef idx="minor">
+                <a:schemeClr val="lt1"/>
+              </a:fontRef>
+            </p:style>
+            <p:txBody>
+              <a:bodyPr rtlCol="0" anchor="ctr"/>
+              <a:lstStyle/>
+              <a:p>
+                <a:pPr algn="ctr"/>
+                <a:r>
+                  <a:rPr lang="en-US" b="1" noProof="1">
+                    <a:solidFill>
+                      <a:schemeClr val="tx1"/>
+                    </a:solidFill>
+                  </a:rPr>
+                  <a:t>XBool</a:t>
+                </a:r>
+              </a:p>
+            </p:txBody>
+          </p:sp>
+          <p:sp>
+            <p:nvSpPr>
+              <p:cNvPr id="29" name="Dreieck 28">
+                <a:extLst>
+                  <a:ext uri="{FF2B5EF4-FFF2-40B4-BE49-F238E27FC236}">
+                    <a16:creationId xmlns:a16="http://schemas.microsoft.com/office/drawing/2014/main" id="{580176AE-AD6D-56AB-13CB-35D3AAD12BC3}"/>
+                  </a:ext>
+                </a:extLst>
+              </p:cNvPr>
+              <p:cNvSpPr/>
+              <p:nvPr/>
+            </p:nvSpPr>
+            <p:spPr>
+              <a:xfrm>
+                <a:off x="4144456" y="5566004"/>
+                <a:ext cx="242888" cy="200025"/>
+              </a:xfrm>
+              <a:prstGeom prst="triangle">
+                <a:avLst/>
+              </a:prstGeom>
+              <a:solidFill>
+                <a:schemeClr val="bg1"/>
+              </a:solidFill>
+              <a:ln w="19050">
+                <a:solidFill>
+                  <a:schemeClr val="tx1"/>
+                </a:solidFill>
+              </a:ln>
+            </p:spPr>
+            <p:style>
+              <a:lnRef idx="2">
+                <a:schemeClr val="accent1">
+                  <a:shade val="50000"/>
+                </a:schemeClr>
+              </a:lnRef>
+              <a:fillRef idx="1">
+                <a:schemeClr val="accent1"/>
+              </a:fillRef>
+              <a:effectRef idx="0">
+                <a:schemeClr val="accent1"/>
+              </a:effectRef>
+              <a:fontRef idx="minor">
+                <a:schemeClr val="lt1"/>
+              </a:fontRef>
+            </p:style>
+            <p:txBody>
+              <a:bodyPr rtlCol="0" anchor="ctr"/>
+              <a:lstStyle/>
+              <a:p>
+                <a:pPr algn="ctr"/>
+                <a:endParaRPr lang="en-US" dirty="0"/>
+              </a:p>
+            </p:txBody>
+          </p:sp>
+          <p:cxnSp>
+            <p:nvCxnSpPr>
+              <p:cNvPr id="36" name="Gerade Verbindung 35">
+                <a:extLst>
+                  <a:ext uri="{FF2B5EF4-FFF2-40B4-BE49-F238E27FC236}">
+                    <a16:creationId xmlns:a16="http://schemas.microsoft.com/office/drawing/2014/main" id="{620A31AA-0480-E34B-39C8-6A0E7B1523BA}"/>
+                  </a:ext>
+                </a:extLst>
+              </p:cNvPr>
+              <p:cNvCxnSpPr>
+                <a:stCxn id="29" idx="3"/>
+              </p:cNvCxnSpPr>
+              <p:nvPr/>
+            </p:nvCxnSpPr>
+            <p:spPr>
+              <a:xfrm>
+                <a:off x="4265900" y="5766029"/>
+                <a:ext cx="0" cy="332519"/>
+              </a:xfrm>
+              <a:prstGeom prst="line">
+                <a:avLst/>
+              </a:prstGeom>
+              <a:ln w="19050">
+                <a:solidFill>
+                  <a:schemeClr val="tx1"/>
+                </a:solidFill>
+                <a:tailEnd type="none" w="lg" len="lg"/>
+              </a:ln>
+            </p:spPr>
+            <p:style>
+              <a:lnRef idx="1">
+                <a:schemeClr val="accent1"/>
+              </a:lnRef>
+              <a:fillRef idx="0">
+                <a:schemeClr val="accent1"/>
+              </a:fillRef>
+              <a:effectRef idx="0">
+                <a:schemeClr val="accent1"/>
+              </a:effectRef>
+              <a:fontRef idx="minor">
+                <a:schemeClr val="tx1"/>
+              </a:fontRef>
+            </p:style>
+          </p:cxnSp>
+          <p:grpSp>
+            <p:nvGrpSpPr>
+              <p:cNvPr id="39" name="Gruppieren 38">
+                <a:extLst>
+                  <a:ext uri="{FF2B5EF4-FFF2-40B4-BE49-F238E27FC236}">
+                    <a16:creationId xmlns:a16="http://schemas.microsoft.com/office/drawing/2014/main" id="{96EEC882-F088-DCEA-4146-531018027037}"/>
+                  </a:ext>
+                </a:extLst>
+              </p:cNvPr>
+              <p:cNvGrpSpPr/>
+              <p:nvPr/>
+            </p:nvGrpSpPr>
+            <p:grpSpPr>
+              <a:xfrm>
+                <a:off x="7317103" y="5573863"/>
+                <a:ext cx="242888" cy="532544"/>
+                <a:chOff x="4296856" y="5718404"/>
+                <a:chExt cx="242888" cy="532544"/>
+              </a:xfrm>
+            </p:grpSpPr>
+            <p:sp>
+              <p:nvSpPr>
+                <p:cNvPr id="37" name="Dreieck 36">
+                  <a:extLst>
+                    <a:ext uri="{FF2B5EF4-FFF2-40B4-BE49-F238E27FC236}">
+                      <a16:creationId xmlns:a16="http://schemas.microsoft.com/office/drawing/2014/main" id="{E1962B8F-9A3D-B14B-349F-553210EC60A9}"/>
+                    </a:ext>
+                  </a:extLst>
+                </p:cNvPr>
+                <p:cNvSpPr/>
+                <p:nvPr/>
+              </p:nvSpPr>
+              <p:spPr>
+                <a:xfrm>
+                  <a:off x="4296856" y="5718404"/>
+                  <a:ext cx="242888" cy="200025"/>
+                </a:xfrm>
+                <a:prstGeom prst="triangle">
+                  <a:avLst/>
+                </a:prstGeom>
+                <a:solidFill>
+                  <a:schemeClr val="bg1"/>
+                </a:solidFill>
+                <a:ln w="19050">
+                  <a:solidFill>
+                    <a:schemeClr val="tx1"/>
+                  </a:solidFill>
+                </a:ln>
+              </p:spPr>
+              <p:style>
+                <a:lnRef idx="2">
+                  <a:schemeClr val="accent1">
+                    <a:shade val="50000"/>
+                  </a:schemeClr>
+                </a:lnRef>
+                <a:fillRef idx="1">
+                  <a:schemeClr val="accent1"/>
+                </a:fillRef>
+                <a:effectRef idx="0">
+                  <a:schemeClr val="accent1"/>
+                </a:effectRef>
+                <a:fontRef idx="minor">
+                  <a:schemeClr val="lt1"/>
+                </a:fontRef>
+              </p:style>
+              <p:txBody>
+                <a:bodyPr rtlCol="0" anchor="ctr"/>
+                <a:lstStyle/>
+                <a:p>
+                  <a:pPr algn="ctr"/>
+                  <a:endParaRPr lang="en-US" dirty="0"/>
+                </a:p>
+              </p:txBody>
+            </p:sp>
+            <p:cxnSp>
+              <p:nvCxnSpPr>
+                <p:cNvPr id="38" name="Gerade Verbindung 37">
+                  <a:extLst>
+                    <a:ext uri="{FF2B5EF4-FFF2-40B4-BE49-F238E27FC236}">
+                      <a16:creationId xmlns:a16="http://schemas.microsoft.com/office/drawing/2014/main" id="{4CD8E598-C9D0-06C4-AFBE-3BE2A5E0592F}"/>
+                    </a:ext>
+                  </a:extLst>
+                </p:cNvPr>
+                <p:cNvCxnSpPr>
+                  <a:stCxn id="37" idx="3"/>
+                </p:cNvCxnSpPr>
+                <p:nvPr/>
+              </p:nvCxnSpPr>
+              <p:spPr>
+                <a:xfrm>
+                  <a:off x="4418300" y="5918429"/>
+                  <a:ext cx="0" cy="332519"/>
+                </a:xfrm>
+                <a:prstGeom prst="line">
+                  <a:avLst/>
+                </a:prstGeom>
+                <a:ln w="19050">
+                  <a:solidFill>
+                    <a:schemeClr val="tx1"/>
+                  </a:solidFill>
+                  <a:tailEnd type="none" w="lg" len="lg"/>
+                </a:ln>
+              </p:spPr>
+              <p:style>
+                <a:lnRef idx="1">
+                  <a:schemeClr val="accent1"/>
+                </a:lnRef>
+                <a:fillRef idx="0">
+                  <a:schemeClr val="accent1"/>
+                </a:fillRef>
+                <a:effectRef idx="0">
+                  <a:schemeClr val="accent1"/>
+                </a:effectRef>
+                <a:fontRef idx="minor">
+                  <a:schemeClr val="tx1"/>
+                </a:fontRef>
+              </p:style>
+            </p:cxnSp>
+          </p:grpSp>
+          <p:grpSp>
+            <p:nvGrpSpPr>
+              <p:cNvPr id="40" name="Gruppieren 39">
+                <a:extLst>
+                  <a:ext uri="{FF2B5EF4-FFF2-40B4-BE49-F238E27FC236}">
+                    <a16:creationId xmlns:a16="http://schemas.microsoft.com/office/drawing/2014/main" id="{9CD2F4CC-4691-6259-BBFD-77762B9932BB}"/>
+                  </a:ext>
+                </a:extLst>
+              </p:cNvPr>
+              <p:cNvGrpSpPr/>
+              <p:nvPr/>
+            </p:nvGrpSpPr>
+            <p:grpSpPr>
+              <a:xfrm>
+                <a:off x="10446885" y="5551410"/>
+                <a:ext cx="242888" cy="532544"/>
+                <a:chOff x="4296856" y="5718404"/>
+                <a:chExt cx="242888" cy="532544"/>
+              </a:xfrm>
+            </p:grpSpPr>
+            <p:sp>
+              <p:nvSpPr>
+                <p:cNvPr id="41" name="Dreieck 40">
+                  <a:extLst>
+                    <a:ext uri="{FF2B5EF4-FFF2-40B4-BE49-F238E27FC236}">
+                      <a16:creationId xmlns:a16="http://schemas.microsoft.com/office/drawing/2014/main" id="{0873A60E-6474-9D05-A1C7-1A92035C5932}"/>
+                    </a:ext>
+                  </a:extLst>
+                </p:cNvPr>
+                <p:cNvSpPr/>
+                <p:nvPr/>
+              </p:nvSpPr>
+              <p:spPr>
+                <a:xfrm>
+                  <a:off x="4296856" y="5718404"/>
+                  <a:ext cx="242888" cy="200025"/>
+                </a:xfrm>
+                <a:prstGeom prst="triangle">
+                  <a:avLst/>
+                </a:prstGeom>
+                <a:solidFill>
+                  <a:schemeClr val="bg1"/>
+                </a:solidFill>
+                <a:ln w="19050">
+                  <a:solidFill>
+                    <a:schemeClr val="tx1"/>
+                  </a:solidFill>
+                </a:ln>
+              </p:spPr>
+              <p:style>
+                <a:lnRef idx="2">
+                  <a:schemeClr val="accent1">
+                    <a:shade val="50000"/>
+                  </a:schemeClr>
+                </a:lnRef>
+                <a:fillRef idx="1">
+                  <a:schemeClr val="accent1"/>
+                </a:fillRef>
+                <a:effectRef idx="0">
+                  <a:schemeClr val="accent1"/>
+                </a:effectRef>
+                <a:fontRef idx="minor">
+                  <a:schemeClr val="lt1"/>
+                </a:fontRef>
+              </p:style>
+              <p:txBody>
+                <a:bodyPr rtlCol="0" anchor="ctr"/>
+                <a:lstStyle/>
+                <a:p>
+                  <a:pPr algn="ctr"/>
+                  <a:endParaRPr lang="en-US" dirty="0"/>
+                </a:p>
+              </p:txBody>
+            </p:sp>
+            <p:cxnSp>
+              <p:nvCxnSpPr>
+                <p:cNvPr id="42" name="Gerade Verbindung 41">
+                  <a:extLst>
+                    <a:ext uri="{FF2B5EF4-FFF2-40B4-BE49-F238E27FC236}">
+                      <a16:creationId xmlns:a16="http://schemas.microsoft.com/office/drawing/2014/main" id="{379605C4-87B1-6029-5DE6-89E57500FBB8}"/>
+                    </a:ext>
+                  </a:extLst>
+                </p:cNvPr>
+                <p:cNvCxnSpPr>
+                  <a:stCxn id="41" idx="3"/>
+                </p:cNvCxnSpPr>
+                <p:nvPr/>
+              </p:nvCxnSpPr>
+              <p:spPr>
+                <a:xfrm>
+                  <a:off x="4418300" y="5918429"/>
+                  <a:ext cx="0" cy="332519"/>
+                </a:xfrm>
+                <a:prstGeom prst="line">
+                  <a:avLst/>
+                </a:prstGeom>
+                <a:ln w="19050">
+                  <a:solidFill>
+                    <a:schemeClr val="tx1"/>
+                  </a:solidFill>
+                  <a:tailEnd type="none" w="lg" len="lg"/>
+                </a:ln>
+              </p:spPr>
+              <p:style>
+                <a:lnRef idx="1">
+                  <a:schemeClr val="accent1"/>
+                </a:lnRef>
+                <a:fillRef idx="0">
+                  <a:schemeClr val="accent1"/>
+                </a:fillRef>
+                <a:effectRef idx="0">
+                  <a:schemeClr val="accent1"/>
+                </a:effectRef>
+                <a:fontRef idx="minor">
+                  <a:schemeClr val="tx1"/>
+                </a:fontRef>
+              </p:style>
+            </p:cxnSp>
+          </p:grpSp>
+        </p:grpSp>
+        <p:cxnSp>
+          <p:nvCxnSpPr>
+            <p:cNvPr id="45" name="Gewinkelte Verbindung 44">
+              <a:extLst>
+                <a:ext uri="{FF2B5EF4-FFF2-40B4-BE49-F238E27FC236}">
+                  <a16:creationId xmlns:a16="http://schemas.microsoft.com/office/drawing/2014/main" id="{C877B069-EEA0-44BA-D405-0850AFC6360D}"/>
+                </a:ext>
+              </a:extLst>
+            </p:cNvPr>
+            <p:cNvCxnSpPr>
+              <a:cxnSpLocks/>
+              <a:stCxn id="50" idx="2"/>
+            </p:cNvCxnSpPr>
+            <p:nvPr/>
+          </p:nvCxnSpPr>
+          <p:spPr>
+            <a:xfrm rot="16200000" flipH="1">
+              <a:off x="1872047" y="3359083"/>
+              <a:ext cx="345252" cy="1651956"/>
+            </a:xfrm>
+            <a:prstGeom prst="bentConnector2">
+              <a:avLst/>
+            </a:prstGeom>
+            <a:ln w="19050">
+              <a:solidFill>
+                <a:schemeClr val="tx1"/>
+              </a:solidFill>
+              <a:tailEnd type="none" w="lg" len="lg"/>
+            </a:ln>
+          </p:spPr>
+          <p:style>
+            <a:lnRef idx="1">
+              <a:schemeClr val="accent1"/>
+            </a:lnRef>
+            <a:fillRef idx="0">
+              <a:schemeClr val="accent1"/>
+            </a:fillRef>
+            <a:effectRef idx="0">
+              <a:schemeClr val="accent1"/>
+            </a:effectRef>
+            <a:fontRef idx="minor">
+              <a:schemeClr val="tx1"/>
+            </a:fontRef>
+          </p:style>
+        </p:cxnSp>
+        <p:grpSp>
+          <p:nvGrpSpPr>
+            <p:cNvPr id="51" name="Gruppieren 50">
+              <a:extLst>
+                <a:ext uri="{FF2B5EF4-FFF2-40B4-BE49-F238E27FC236}">
+                  <a16:creationId xmlns:a16="http://schemas.microsoft.com/office/drawing/2014/main" id="{1293E8CA-EECA-224C-CA2E-7ED762268E24}"/>
+                </a:ext>
+              </a:extLst>
+            </p:cNvPr>
+            <p:cNvGrpSpPr/>
+            <p:nvPr/>
+          </p:nvGrpSpPr>
+          <p:grpSpPr>
+            <a:xfrm>
+              <a:off x="1126906" y="3829050"/>
+              <a:ext cx="183577" cy="183385"/>
+              <a:chOff x="1126906" y="3829050"/>
+              <a:chExt cx="183577" cy="183385"/>
+            </a:xfrm>
+          </p:grpSpPr>
+          <p:sp>
+            <p:nvSpPr>
+              <p:cNvPr id="43" name="Rechteck 42">
+                <a:extLst>
+                  <a:ext uri="{FF2B5EF4-FFF2-40B4-BE49-F238E27FC236}">
+                    <a16:creationId xmlns:a16="http://schemas.microsoft.com/office/drawing/2014/main" id="{56CBD6DD-0DCD-CDF3-D1E6-6525CB5652A9}"/>
+                  </a:ext>
+                </a:extLst>
+              </p:cNvPr>
+              <p:cNvSpPr/>
+              <p:nvPr/>
+            </p:nvSpPr>
+            <p:spPr>
+              <a:xfrm rot="2791918">
+                <a:off x="1155077" y="3854575"/>
+                <a:ext cx="127235" cy="132336"/>
+              </a:xfrm>
+              <a:prstGeom prst="rect">
+                <a:avLst/>
+              </a:prstGeom>
+              <a:solidFill>
+                <a:schemeClr val="tx1"/>
+              </a:solidFill>
+              <a:ln w="19050">
+                <a:solidFill>
+                  <a:schemeClr val="tx1"/>
+                </a:solidFill>
+              </a:ln>
+            </p:spPr>
+            <p:style>
+              <a:lnRef idx="2">
+                <a:schemeClr val="accent1">
+                  <a:shade val="50000"/>
+                </a:schemeClr>
+              </a:lnRef>
+              <a:fillRef idx="1">
+                <a:schemeClr val="accent1"/>
+              </a:fillRef>
+              <a:effectRef idx="0">
+                <a:schemeClr val="accent1"/>
+              </a:effectRef>
+              <a:fontRef idx="minor">
+                <a:schemeClr val="lt1"/>
+              </a:fontRef>
+            </p:style>
+            <p:txBody>
+              <a:bodyPr rtlCol="0" anchor="ctr"/>
+              <a:lstStyle/>
+              <a:p>
+                <a:pPr algn="ctr"/>
+                <a:endParaRPr lang="en-US" dirty="0"/>
+              </a:p>
+            </p:txBody>
+          </p:sp>
+          <p:sp>
+            <p:nvSpPr>
+              <p:cNvPr id="50" name="Rechteck 49">
+                <a:extLst>
+                  <a:ext uri="{FF2B5EF4-FFF2-40B4-BE49-F238E27FC236}">
+                    <a16:creationId xmlns:a16="http://schemas.microsoft.com/office/drawing/2014/main" id="{A9059396-4096-1ABD-E976-25F366804424}"/>
+                  </a:ext>
+                </a:extLst>
+              </p:cNvPr>
+              <p:cNvSpPr/>
+              <p:nvPr/>
+            </p:nvSpPr>
+            <p:spPr>
+              <a:xfrm>
+                <a:off x="1126906" y="3829050"/>
+                <a:ext cx="183577" cy="183385"/>
+              </a:xfrm>
+              <a:prstGeom prst="rect">
+                <a:avLst/>
+              </a:prstGeom>
+              <a:noFill/>
+              <a:ln w="19050">
+                <a:noFill/>
+              </a:ln>
+            </p:spPr>
+            <p:style>
+              <a:lnRef idx="2">
+                <a:schemeClr val="accent1">
+                  <a:shade val="50000"/>
+                </a:schemeClr>
+              </a:lnRef>
+              <a:fillRef idx="1">
+                <a:schemeClr val="accent1"/>
+              </a:fillRef>
+              <a:effectRef idx="0">
+                <a:schemeClr val="accent1"/>
+              </a:effectRef>
+              <a:fontRef idx="minor">
+                <a:schemeClr val="lt1"/>
+              </a:fontRef>
+            </p:style>
+            <p:txBody>
+              <a:bodyPr rtlCol="0" anchor="ctr"/>
+              <a:lstStyle/>
+              <a:p>
+                <a:pPr algn="ctr"/>
+                <a:endParaRPr lang="en-US" dirty="0"/>
+              </a:p>
+            </p:txBody>
+          </p:sp>
+        </p:grpSp>
+        <p:cxnSp>
+          <p:nvCxnSpPr>
+            <p:cNvPr id="53" name="Gewinkelte Verbindung 52">
+              <a:extLst>
+                <a:ext uri="{FF2B5EF4-FFF2-40B4-BE49-F238E27FC236}">
+                  <a16:creationId xmlns:a16="http://schemas.microsoft.com/office/drawing/2014/main" id="{D5EF91C3-82A2-B160-EC98-6B59F611E39B}"/>
+                </a:ext>
+              </a:extLst>
+            </p:cNvPr>
+            <p:cNvCxnSpPr>
+              <a:cxnSpLocks/>
+              <a:stCxn id="50" idx="2"/>
+              <a:endCxn id="6" idx="2"/>
+            </p:cNvCxnSpPr>
+            <p:nvPr/>
+          </p:nvCxnSpPr>
+          <p:spPr>
+            <a:xfrm rot="16200000" flipH="1">
+              <a:off x="3945542" y="1285588"/>
+              <a:ext cx="751870" cy="6205564"/>
+            </a:xfrm>
+            <a:prstGeom prst="bentConnector3">
+              <a:avLst>
+                <a:gd name="adj1" fmla="val 117102"/>
+              </a:avLst>
+            </a:prstGeom>
+            <a:ln w="19050">
+              <a:solidFill>
+                <a:schemeClr val="tx1"/>
+              </a:solidFill>
+              <a:tailEnd type="none" w="lg" len="lg"/>
+            </a:ln>
+          </p:spPr>
+          <p:style>
+            <a:lnRef idx="1">
+              <a:schemeClr val="accent1"/>
+            </a:lnRef>
+            <a:fillRef idx="0">
+              <a:schemeClr val="accent1"/>
+            </a:fillRef>
+            <a:effectRef idx="0">
+              <a:schemeClr val="accent1"/>
+            </a:effectRef>
+            <a:fontRef idx="minor">
+              <a:schemeClr val="tx1"/>
+            </a:fontRef>
+          </p:style>
+        </p:cxnSp>
+        <p:cxnSp>
+          <p:nvCxnSpPr>
+            <p:cNvPr id="56" name="Gewinkelte Verbindung 55">
+              <a:extLst>
+                <a:ext uri="{FF2B5EF4-FFF2-40B4-BE49-F238E27FC236}">
+                  <a16:creationId xmlns:a16="http://schemas.microsoft.com/office/drawing/2014/main" id="{602CDD34-AF72-EF5D-E962-E23FA4A66E87}"/>
+                </a:ext>
+              </a:extLst>
+            </p:cNvPr>
+            <p:cNvCxnSpPr>
+              <a:cxnSpLocks/>
+              <a:stCxn id="50" idx="2"/>
+              <a:endCxn id="7" idx="2"/>
+            </p:cNvCxnSpPr>
+            <p:nvPr/>
+          </p:nvCxnSpPr>
+          <p:spPr>
+            <a:xfrm rot="16200000" flipH="1">
+              <a:off x="5524722" y="-293592"/>
+              <a:ext cx="751869" cy="9363922"/>
+            </a:xfrm>
+            <a:prstGeom prst="bentConnector3">
+              <a:avLst>
+                <a:gd name="adj1" fmla="val 117102"/>
+              </a:avLst>
+            </a:prstGeom>
+            <a:ln w="19050">
+              <a:solidFill>
+                <a:schemeClr val="tx1"/>
+              </a:solidFill>
+              <a:tailEnd type="none" w="lg" len="lg"/>
+            </a:ln>
+          </p:spPr>
+          <p:style>
+            <a:lnRef idx="1">
+              <a:schemeClr val="accent1"/>
+            </a:lnRef>
+            <a:fillRef idx="0">
+              <a:schemeClr val="accent1"/>
+            </a:fillRef>
+            <a:effectRef idx="0">
+              <a:schemeClr val="accent1"/>
+            </a:effectRef>
+            <a:fontRef idx="minor">
+              <a:schemeClr val="tx1"/>
+            </a:fontRef>
+          </p:style>
+        </p:cxnSp>
+        <p:sp>
+          <p:nvSpPr>
+            <p:cNvPr id="12" name="Rechteck 11">
+              <a:extLst>
+                <a:ext uri="{FF2B5EF4-FFF2-40B4-BE49-F238E27FC236}">
+                  <a16:creationId xmlns:a16="http://schemas.microsoft.com/office/drawing/2014/main" id="{08512E7D-51F8-F853-7C84-967FF0FAA3B8}"/>
+                </a:ext>
+              </a:extLst>
+            </p:cNvPr>
+            <p:cNvSpPr/>
+            <p:nvPr/>
+          </p:nvSpPr>
+          <p:spPr>
+            <a:xfrm>
+              <a:off x="2870653" y="6098548"/>
+              <a:ext cx="9107212" cy="604346"/>
+            </a:xfrm>
+            <a:prstGeom prst="rect">
+              <a:avLst/>
+            </a:prstGeom>
+            <a:solidFill>
+              <a:schemeClr val="bg1"/>
+            </a:solidFill>
+            <a:ln w="19050">
+              <a:solidFill>
+                <a:schemeClr val="tx1"/>
+              </a:solidFill>
+            </a:ln>
+          </p:spPr>
+          <p:style>
+            <a:lnRef idx="2">
+              <a:schemeClr val="accent1">
+                <a:shade val="50000"/>
+              </a:schemeClr>
+            </a:lnRef>
+            <a:fillRef idx="1">
+              <a:schemeClr val="accent1"/>
+            </a:fillRef>
+            <a:effectRef idx="0">
+              <a:schemeClr val="accent1"/>
+            </a:effectRef>
+            <a:fontRef idx="minor">
+              <a:schemeClr val="lt1"/>
+            </a:fontRef>
+          </p:style>
+          <p:txBody>
+            <a:bodyPr rtlCol="0" anchor="ctr"/>
+            <a:lstStyle/>
+            <a:p>
+              <a:pPr algn="ctr"/>
+              <a:r>
+                <a:rPr lang="en-US" b="1" noProof="1">
+                  <a:solidFill>
+                    <a:schemeClr val="tx1"/>
+                  </a:solidFill>
+                </a:rPr>
+                <a:t>ValueRange&lt;*&gt;: </a:t>
+              </a:r>
+              <a:r>
+                <a:rPr lang="en-US" noProof="1">
+                  <a:solidFill>
+                    <a:schemeClr val="tx1"/>
+                  </a:solidFill>
+                </a:rPr>
+                <a:t>Constants empty, zero, one, all; Set functions intersect, union</a:t>
+              </a:r>
+            </a:p>
+          </p:txBody>
+        </p:sp>
+        <p:grpSp>
+          <p:nvGrpSpPr>
+            <p:cNvPr id="60" name="Gruppieren 59">
+              <a:extLst>
+                <a:ext uri="{FF2B5EF4-FFF2-40B4-BE49-F238E27FC236}">
+                  <a16:creationId xmlns:a16="http://schemas.microsoft.com/office/drawing/2014/main" id="{779D5F0E-4BC9-9FA0-17D9-5BAC1029992B}"/>
+                </a:ext>
+              </a:extLst>
+            </p:cNvPr>
+            <p:cNvGrpSpPr/>
+            <p:nvPr/>
+          </p:nvGrpSpPr>
+          <p:grpSpPr>
+            <a:xfrm>
+              <a:off x="4175191" y="4995326"/>
+              <a:ext cx="183577" cy="183385"/>
+              <a:chOff x="1126906" y="3829050"/>
+              <a:chExt cx="183577" cy="183385"/>
+            </a:xfrm>
+          </p:grpSpPr>
+          <p:sp>
+            <p:nvSpPr>
+              <p:cNvPr id="61" name="Rechteck 60">
+                <a:extLst>
+                  <a:ext uri="{FF2B5EF4-FFF2-40B4-BE49-F238E27FC236}">
+                    <a16:creationId xmlns:a16="http://schemas.microsoft.com/office/drawing/2014/main" id="{46DA00D4-0474-CA9A-5164-A8773DB45E4C}"/>
+                  </a:ext>
+                </a:extLst>
+              </p:cNvPr>
+              <p:cNvSpPr/>
+              <p:nvPr/>
+            </p:nvSpPr>
+            <p:spPr>
+              <a:xfrm rot="2791918">
+                <a:off x="1155077" y="3854575"/>
+                <a:ext cx="127235" cy="132336"/>
+              </a:xfrm>
+              <a:prstGeom prst="rect">
+                <a:avLst/>
+              </a:prstGeom>
+              <a:solidFill>
+                <a:schemeClr val="tx1"/>
+              </a:solidFill>
+              <a:ln w="19050">
+                <a:solidFill>
+                  <a:schemeClr val="tx1"/>
+                </a:solidFill>
+              </a:ln>
+            </p:spPr>
+            <p:style>
+              <a:lnRef idx="2">
+                <a:schemeClr val="accent1">
+                  <a:shade val="50000"/>
+                </a:schemeClr>
+              </a:lnRef>
+              <a:fillRef idx="1">
+                <a:schemeClr val="accent1"/>
+              </a:fillRef>
+              <a:effectRef idx="0">
+                <a:schemeClr val="accent1"/>
+              </a:effectRef>
+              <a:fontRef idx="minor">
+                <a:schemeClr val="lt1"/>
+              </a:fontRef>
+            </p:style>
+            <p:txBody>
+              <a:bodyPr rtlCol="0" anchor="ctr"/>
+              <a:lstStyle/>
+              <a:p>
+                <a:pPr algn="ctr"/>
+                <a:endParaRPr lang="en-US" dirty="0"/>
+              </a:p>
+            </p:txBody>
+          </p:sp>
+          <p:sp>
+            <p:nvSpPr>
+              <p:cNvPr id="62" name="Rechteck 61">
+                <a:extLst>
+                  <a:ext uri="{FF2B5EF4-FFF2-40B4-BE49-F238E27FC236}">
+                    <a16:creationId xmlns:a16="http://schemas.microsoft.com/office/drawing/2014/main" id="{E896E38B-1307-B12F-96EE-E1F29D6CCC27}"/>
+                  </a:ext>
+                </a:extLst>
+              </p:cNvPr>
+              <p:cNvSpPr/>
+              <p:nvPr/>
+            </p:nvSpPr>
+            <p:spPr>
+              <a:xfrm>
+                <a:off x="1126906" y="3829050"/>
+                <a:ext cx="183577" cy="183385"/>
+              </a:xfrm>
+              <a:prstGeom prst="rect">
+                <a:avLst/>
+              </a:prstGeom>
+              <a:noFill/>
+              <a:ln w="19050">
+                <a:noFill/>
+              </a:ln>
+            </p:spPr>
+            <p:style>
+              <a:lnRef idx="2">
+                <a:schemeClr val="accent1">
+                  <a:shade val="50000"/>
+                </a:schemeClr>
+              </a:lnRef>
+              <a:fillRef idx="1">
+                <a:schemeClr val="accent1"/>
+              </a:fillRef>
+              <a:effectRef idx="0">
+                <a:schemeClr val="accent1"/>
+              </a:effectRef>
+              <a:fontRef idx="minor">
+                <a:schemeClr val="lt1"/>
+              </a:fontRef>
+            </p:style>
+            <p:txBody>
+              <a:bodyPr rtlCol="0" anchor="ctr"/>
+              <a:lstStyle/>
+              <a:p>
+                <a:pPr algn="ctr"/>
+                <a:endParaRPr lang="en-US" dirty="0"/>
+              </a:p>
+            </p:txBody>
+          </p:sp>
+        </p:grpSp>
+        <p:grpSp>
+          <p:nvGrpSpPr>
+            <p:cNvPr id="65" name="Gruppieren 64">
+              <a:extLst>
+                <a:ext uri="{FF2B5EF4-FFF2-40B4-BE49-F238E27FC236}">
+                  <a16:creationId xmlns:a16="http://schemas.microsoft.com/office/drawing/2014/main" id="{67F383B2-A43E-2E64-61FB-30EF56F6FBB4}"/>
+                </a:ext>
+              </a:extLst>
+            </p:cNvPr>
+            <p:cNvGrpSpPr/>
+            <p:nvPr/>
+          </p:nvGrpSpPr>
+          <p:grpSpPr>
+            <a:xfrm>
+              <a:off x="7518213" y="4988948"/>
+              <a:ext cx="183577" cy="183385"/>
+              <a:chOff x="1126906" y="3829050"/>
+              <a:chExt cx="183577" cy="183385"/>
+            </a:xfrm>
+          </p:grpSpPr>
+          <p:sp>
+            <p:nvSpPr>
+              <p:cNvPr id="66" name="Rechteck 65">
+                <a:extLst>
+                  <a:ext uri="{FF2B5EF4-FFF2-40B4-BE49-F238E27FC236}">
+                    <a16:creationId xmlns:a16="http://schemas.microsoft.com/office/drawing/2014/main" id="{125DFEF2-0967-EA9E-27A1-20CE27A94137}"/>
+                  </a:ext>
+                </a:extLst>
+              </p:cNvPr>
+              <p:cNvSpPr/>
+              <p:nvPr/>
+            </p:nvSpPr>
+            <p:spPr>
+              <a:xfrm rot="2791918">
+                <a:off x="1155077" y="3854575"/>
+                <a:ext cx="127235" cy="132336"/>
+              </a:xfrm>
+              <a:prstGeom prst="rect">
+                <a:avLst/>
+              </a:prstGeom>
+              <a:solidFill>
+                <a:schemeClr val="tx1"/>
+              </a:solidFill>
+              <a:ln w="19050">
+                <a:solidFill>
+                  <a:schemeClr val="tx1"/>
+                </a:solidFill>
+              </a:ln>
+            </p:spPr>
+            <p:style>
+              <a:lnRef idx="2">
+                <a:schemeClr val="accent1">
+                  <a:shade val="50000"/>
+                </a:schemeClr>
+              </a:lnRef>
+              <a:fillRef idx="1">
+                <a:schemeClr val="accent1"/>
+              </a:fillRef>
+              <a:effectRef idx="0">
+                <a:schemeClr val="accent1"/>
+              </a:effectRef>
+              <a:fontRef idx="minor">
+                <a:schemeClr val="lt1"/>
+              </a:fontRef>
+            </p:style>
+            <p:txBody>
+              <a:bodyPr rtlCol="0" anchor="ctr"/>
+              <a:lstStyle/>
+              <a:p>
+                <a:pPr algn="ctr"/>
+                <a:endParaRPr lang="en-US" dirty="0"/>
+              </a:p>
+            </p:txBody>
+          </p:sp>
+          <p:sp>
+            <p:nvSpPr>
+              <p:cNvPr id="67" name="Rechteck 66">
+                <a:extLst>
+                  <a:ext uri="{FF2B5EF4-FFF2-40B4-BE49-F238E27FC236}">
+                    <a16:creationId xmlns:a16="http://schemas.microsoft.com/office/drawing/2014/main" id="{103B456A-1AD8-6026-FA99-8508F9A4CDE6}"/>
+                  </a:ext>
+                </a:extLst>
+              </p:cNvPr>
+              <p:cNvSpPr/>
+              <p:nvPr/>
+            </p:nvSpPr>
+            <p:spPr>
+              <a:xfrm>
+                <a:off x="1126906" y="3829050"/>
+                <a:ext cx="183577" cy="183385"/>
+              </a:xfrm>
+              <a:prstGeom prst="rect">
+                <a:avLst/>
+              </a:prstGeom>
+              <a:noFill/>
+              <a:ln w="19050">
+                <a:noFill/>
+              </a:ln>
+            </p:spPr>
+            <p:style>
+              <a:lnRef idx="2">
+                <a:schemeClr val="accent1">
+                  <a:shade val="50000"/>
+                </a:schemeClr>
+              </a:lnRef>
+              <a:fillRef idx="1">
+                <a:schemeClr val="accent1"/>
+              </a:fillRef>
+              <a:effectRef idx="0">
+                <a:schemeClr val="accent1"/>
+              </a:effectRef>
+              <a:fontRef idx="minor">
+                <a:schemeClr val="lt1"/>
+              </a:fontRef>
+            </p:style>
+            <p:txBody>
+              <a:bodyPr rtlCol="0" anchor="ctr"/>
+              <a:lstStyle/>
+              <a:p>
+                <a:pPr algn="ctr"/>
+                <a:endParaRPr lang="en-US" dirty="0"/>
+              </a:p>
+            </p:txBody>
+          </p:sp>
+        </p:grpSp>
+        <p:grpSp>
+          <p:nvGrpSpPr>
+            <p:cNvPr id="68" name="Gruppieren 67">
+              <a:extLst>
+                <a:ext uri="{FF2B5EF4-FFF2-40B4-BE49-F238E27FC236}">
+                  <a16:creationId xmlns:a16="http://schemas.microsoft.com/office/drawing/2014/main" id="{3C89F190-7186-9B5D-1422-98AA468DD63D}"/>
+                </a:ext>
+              </a:extLst>
+            </p:cNvPr>
+            <p:cNvGrpSpPr/>
+            <p:nvPr/>
+          </p:nvGrpSpPr>
+          <p:grpSpPr>
+            <a:xfrm>
+              <a:off x="10689773" y="4977688"/>
+              <a:ext cx="183577" cy="183385"/>
+              <a:chOff x="1126906" y="3829050"/>
+              <a:chExt cx="183577" cy="183385"/>
+            </a:xfrm>
+          </p:grpSpPr>
+          <p:sp>
+            <p:nvSpPr>
+              <p:cNvPr id="69" name="Rechteck 68">
+                <a:extLst>
+                  <a:ext uri="{FF2B5EF4-FFF2-40B4-BE49-F238E27FC236}">
+                    <a16:creationId xmlns:a16="http://schemas.microsoft.com/office/drawing/2014/main" id="{2D48859A-CE83-056C-1BE8-11B3E54381A5}"/>
+                  </a:ext>
+                </a:extLst>
+              </p:cNvPr>
+              <p:cNvSpPr/>
+              <p:nvPr/>
+            </p:nvSpPr>
+            <p:spPr>
+              <a:xfrm rot="2791918">
+                <a:off x="1155077" y="3854575"/>
+                <a:ext cx="127235" cy="132336"/>
+              </a:xfrm>
+              <a:prstGeom prst="rect">
+                <a:avLst/>
+              </a:prstGeom>
+              <a:solidFill>
+                <a:schemeClr val="tx1"/>
+              </a:solidFill>
+              <a:ln w="19050">
+                <a:solidFill>
+                  <a:schemeClr val="tx1"/>
+                </a:solidFill>
+              </a:ln>
+            </p:spPr>
+            <p:style>
+              <a:lnRef idx="2">
+                <a:schemeClr val="accent1">
+                  <a:shade val="50000"/>
+                </a:schemeClr>
+              </a:lnRef>
+              <a:fillRef idx="1">
+                <a:schemeClr val="accent1"/>
+              </a:fillRef>
+              <a:effectRef idx="0">
+                <a:schemeClr val="accent1"/>
+              </a:effectRef>
+              <a:fontRef idx="minor">
+                <a:schemeClr val="lt1"/>
+              </a:fontRef>
+            </p:style>
+            <p:txBody>
+              <a:bodyPr rtlCol="0" anchor="ctr"/>
+              <a:lstStyle/>
+              <a:p>
+                <a:pPr algn="ctr"/>
+                <a:endParaRPr lang="en-US" dirty="0"/>
+              </a:p>
+            </p:txBody>
+          </p:sp>
+          <p:sp>
+            <p:nvSpPr>
+              <p:cNvPr id="70" name="Rechteck 69">
+                <a:extLst>
+                  <a:ext uri="{FF2B5EF4-FFF2-40B4-BE49-F238E27FC236}">
+                    <a16:creationId xmlns:a16="http://schemas.microsoft.com/office/drawing/2014/main" id="{404714A2-ECCA-6E24-3EC1-B428FC45DD67}"/>
+                  </a:ext>
+                </a:extLst>
+              </p:cNvPr>
+              <p:cNvSpPr/>
+              <p:nvPr/>
+            </p:nvSpPr>
+            <p:spPr>
+              <a:xfrm>
+                <a:off x="1126906" y="3829050"/>
+                <a:ext cx="183577" cy="183385"/>
+              </a:xfrm>
+              <a:prstGeom prst="rect">
+                <a:avLst/>
+              </a:prstGeom>
+              <a:noFill/>
+              <a:ln w="19050">
+                <a:noFill/>
+              </a:ln>
+            </p:spPr>
+            <p:style>
+              <a:lnRef idx="2">
+                <a:schemeClr val="accent1">
+                  <a:shade val="50000"/>
+                </a:schemeClr>
+              </a:lnRef>
+              <a:fillRef idx="1">
+                <a:schemeClr val="accent1"/>
+              </a:fillRef>
+              <a:effectRef idx="0">
+                <a:schemeClr val="accent1"/>
+              </a:effectRef>
+              <a:fontRef idx="minor">
+                <a:schemeClr val="lt1"/>
+              </a:fontRef>
+            </p:style>
+            <p:txBody>
+              <a:bodyPr rtlCol="0" anchor="ctr"/>
+              <a:lstStyle/>
+              <a:p>
+                <a:pPr algn="ctr"/>
+                <a:endParaRPr lang="en-US" dirty="0"/>
+              </a:p>
+            </p:txBody>
+          </p:sp>
+        </p:grpSp>
+        <p:cxnSp>
+          <p:nvCxnSpPr>
+            <p:cNvPr id="72" name="Gerade Verbindung 71">
+              <a:extLst>
+                <a:ext uri="{FF2B5EF4-FFF2-40B4-BE49-F238E27FC236}">
+                  <a16:creationId xmlns:a16="http://schemas.microsoft.com/office/drawing/2014/main" id="{23F7C7E2-9981-D84C-8C27-BB650B43F4DD}"/>
+                </a:ext>
+              </a:extLst>
+            </p:cNvPr>
+            <p:cNvCxnSpPr>
+              <a:cxnSpLocks/>
+              <a:stCxn id="62" idx="0"/>
+              <a:endCxn id="5" idx="2"/>
+            </p:cNvCxnSpPr>
+            <p:nvPr/>
+          </p:nvCxnSpPr>
+          <p:spPr>
+            <a:xfrm flipH="1" flipV="1">
+              <a:off x="4265901" y="4764306"/>
+              <a:ext cx="1079" cy="231020"/>
+            </a:xfrm>
+            <a:prstGeom prst="line">
+              <a:avLst/>
+            </a:prstGeom>
+            <a:ln w="19050">
+              <a:solidFill>
+                <a:schemeClr val="tx1"/>
+              </a:solidFill>
+              <a:tailEnd type="none" w="lg" len="lg"/>
+            </a:ln>
+          </p:spPr>
+          <p:style>
+            <a:lnRef idx="1">
+              <a:schemeClr val="accent1"/>
+            </a:lnRef>
+            <a:fillRef idx="0">
+              <a:schemeClr val="accent1"/>
+            </a:fillRef>
+            <a:effectRef idx="0">
+              <a:schemeClr val="accent1"/>
+            </a:effectRef>
+            <a:fontRef idx="minor">
+              <a:schemeClr val="tx1"/>
+            </a:fontRef>
+          </p:style>
+        </p:cxnSp>
+        <p:cxnSp>
+          <p:nvCxnSpPr>
+            <p:cNvPr id="74" name="Gerade Verbindung 73">
+              <a:extLst>
+                <a:ext uri="{FF2B5EF4-FFF2-40B4-BE49-F238E27FC236}">
+                  <a16:creationId xmlns:a16="http://schemas.microsoft.com/office/drawing/2014/main" id="{56293C59-9273-3D25-55BC-BE87361C2006}"/>
+                </a:ext>
+              </a:extLst>
+            </p:cNvPr>
+            <p:cNvCxnSpPr>
+              <a:cxnSpLocks/>
+              <a:endCxn id="67" idx="0"/>
+            </p:cNvCxnSpPr>
+            <p:nvPr/>
+          </p:nvCxnSpPr>
+          <p:spPr>
+            <a:xfrm>
+              <a:off x="7610001" y="4764304"/>
+              <a:ext cx="1" cy="224644"/>
+            </a:xfrm>
+            <a:prstGeom prst="line">
+              <a:avLst/>
+            </a:prstGeom>
+            <a:ln w="19050">
+              <a:solidFill>
+                <a:schemeClr val="tx1"/>
+              </a:solidFill>
+              <a:tailEnd type="none" w="lg" len="lg"/>
+            </a:ln>
+          </p:spPr>
+          <p:style>
+            <a:lnRef idx="1">
+              <a:schemeClr val="accent1"/>
+            </a:lnRef>
+            <a:fillRef idx="0">
+              <a:schemeClr val="accent1"/>
+            </a:fillRef>
+            <a:effectRef idx="0">
+              <a:schemeClr val="accent1"/>
+            </a:effectRef>
+            <a:fontRef idx="minor">
+              <a:schemeClr val="tx1"/>
+            </a:fontRef>
+          </p:style>
+        </p:cxnSp>
+        <p:cxnSp>
+          <p:nvCxnSpPr>
+            <p:cNvPr id="77" name="Gerade Verbindung 76">
+              <a:extLst>
+                <a:ext uri="{FF2B5EF4-FFF2-40B4-BE49-F238E27FC236}">
+                  <a16:creationId xmlns:a16="http://schemas.microsoft.com/office/drawing/2014/main" id="{565A6C10-F471-23DF-F3D9-D56A552A417B}"/>
+                </a:ext>
+              </a:extLst>
+            </p:cNvPr>
+            <p:cNvCxnSpPr>
+              <a:cxnSpLocks/>
+              <a:endCxn id="70" idx="0"/>
+            </p:cNvCxnSpPr>
+            <p:nvPr/>
+          </p:nvCxnSpPr>
+          <p:spPr>
+            <a:xfrm>
+              <a:off x="10781562" y="4755431"/>
+              <a:ext cx="0" cy="222257"/>
+            </a:xfrm>
+            <a:prstGeom prst="line">
+              <a:avLst/>
+            </a:prstGeom>
+            <a:ln w="19050">
+              <a:solidFill>
+                <a:schemeClr val="tx1"/>
+              </a:solidFill>
+              <a:tailEnd type="none" w="lg" len="lg"/>
+            </a:ln>
+          </p:spPr>
+          <p:style>
+            <a:lnRef idx="1">
+              <a:schemeClr val="accent1"/>
+            </a:lnRef>
+            <a:fillRef idx="0">
+              <a:schemeClr val="accent1"/>
+            </a:fillRef>
+            <a:effectRef idx="0">
+              <a:schemeClr val="accent1"/>
+            </a:effectRef>
+            <a:fontRef idx="minor">
+              <a:schemeClr val="tx1"/>
+            </a:fontRef>
+          </p:style>
+        </p:cxnSp>
+        <p:cxnSp>
+          <p:nvCxnSpPr>
+            <p:cNvPr id="85" name="Gerade Verbindung 84">
+              <a:extLst>
+                <a:ext uri="{FF2B5EF4-FFF2-40B4-BE49-F238E27FC236}">
+                  <a16:creationId xmlns:a16="http://schemas.microsoft.com/office/drawing/2014/main" id="{64F521AC-D9FD-54B3-3BB4-BAE13C97A411}"/>
+                </a:ext>
+              </a:extLst>
+            </p:cNvPr>
+            <p:cNvCxnSpPr>
+              <a:stCxn id="8" idx="1"/>
+            </p:cNvCxnSpPr>
+            <p:nvPr/>
+          </p:nvCxnSpPr>
+          <p:spPr>
+            <a:xfrm flipH="1" flipV="1">
+              <a:off x="2343150" y="5412905"/>
+              <a:ext cx="527503" cy="2"/>
+            </a:xfrm>
+            <a:prstGeom prst="line">
+              <a:avLst/>
+            </a:prstGeom>
+            <a:ln w="19050">
+              <a:solidFill>
+                <a:schemeClr val="tx1"/>
+              </a:solidFill>
+              <a:prstDash val="sysDot"/>
+              <a:tailEnd type="none" w="lg" len="lg"/>
+            </a:ln>
+          </p:spPr>
+          <p:style>
+            <a:lnRef idx="1">
+              <a:schemeClr val="accent1"/>
+            </a:lnRef>
+            <a:fillRef idx="0">
+              <a:schemeClr val="accent1"/>
+            </a:fillRef>
+            <a:effectRef idx="0">
+              <a:schemeClr val="accent1"/>
+            </a:effectRef>
+            <a:fontRef idx="minor">
+              <a:schemeClr val="tx1"/>
+            </a:fontRef>
+          </p:style>
+        </p:cxnSp>
+      </p:grpSp>
+    </p:spTree>
+    <p:extLst>
+      <p:ext uri="{BB962C8B-B14F-4D97-AF65-F5344CB8AC3E}">
+        <p14:creationId xmlns:p14="http://schemas.microsoft.com/office/powerpoint/2010/main" val="935929461"/>
+      </p:ext>
+    </p:extLst>
+  </p:cSld>
+  <p:clrMapOvr>
+    <a:masterClrMapping/>
+  </p:clrMapOvr>
+</p:sld>
+</file>
+
+<file path=ppt/slides/slide6.xml><?xml version="1.0" encoding="utf-8"?>
+<p:sld xmlns:a="http://schemas.openxmlformats.org/drawingml/2006/main" xmlns:r="http://schemas.openxmlformats.org/officeDocument/2006/relationships" xmlns:p="http://schemas.openxmlformats.org/presentationml/2006/main">
+  <p:cSld>
+    <p:spTree>
+      <p:nvGrpSpPr>
+        <p:cNvPr id="1" name=""/>
+        <p:cNvGrpSpPr/>
+        <p:nvPr/>
+      </p:nvGrpSpPr>
+      <p:grpSpPr>
+        <a:xfrm>
+          <a:off x="0" y="0"/>
+          <a:ext cx="0" cy="0"/>
+          <a:chOff x="0" y="0"/>
+          <a:chExt cx="0" cy="0"/>
+        </a:xfrm>
+      </p:grpSpPr>
+    </p:spTree>
+    <p:extLst>
+      <p:ext uri="{BB962C8B-B14F-4D97-AF65-F5344CB8AC3E}">
+        <p14:creationId xmlns:p14="http://schemas.microsoft.com/office/powerpoint/2010/main" val="546484894"/>
       </p:ext>
     </p:extLst>
   </p:cSld>
